--- a/outputs/submission/DATA_MATCH_SpuskoGrad.pptx
+++ b/outputs/submission/DATA_MATCH_SpuskoGrad.pptx
@@ -2,21 +2,21 @@
 <file path=ppt/presentation.xml><?xml version="1.0" encoding="utf-8"?>
 <p:presentation xmlns:p="http://schemas.openxmlformats.org/presentationml/2006/main">
   <p:sldMasterIdLst>
-    <p:sldMasterId xmlns:r="http://schemas.openxmlformats.org/officeDocument/2006/relationships" id="2147483648" r:id="R26606a01233b4439"/>
+    <p:sldMasterId xmlns:r="http://schemas.openxmlformats.org/officeDocument/2006/relationships" id="2147483648" r:id="R6cfe2bbbab964de1"/>
   </p:sldMasterIdLst>
   <p:notesMasterIdLst>
-    <p:notesMasterId xmlns:r="http://schemas.openxmlformats.org/officeDocument/2006/relationships" r:id="Rac274eae76e6475a"/>
+    <p:notesMasterId xmlns:r="http://schemas.openxmlformats.org/officeDocument/2006/relationships" r:id="R3f7a70486a4941db"/>
   </p:notesMasterIdLst>
   <p:sldIdLst>
-    <p:sldId xmlns:r="http://schemas.openxmlformats.org/officeDocument/2006/relationships" id="256" r:id="R53015e0dc2104a37"/>
-    <p:sldId xmlns:r="http://schemas.openxmlformats.org/officeDocument/2006/relationships" id="257" r:id="R3cfd36c527624c45"/>
-    <p:sldId xmlns:r="http://schemas.openxmlformats.org/officeDocument/2006/relationships" id="258" r:id="R43310ed5788c4b59"/>
-    <p:sldId xmlns:r="http://schemas.openxmlformats.org/officeDocument/2006/relationships" id="259" r:id="R1b53c72d04cd4a18"/>
-    <p:sldId xmlns:r="http://schemas.openxmlformats.org/officeDocument/2006/relationships" id="260" r:id="R9f97b0ce8cdb4f24"/>
-    <p:sldId xmlns:r="http://schemas.openxmlformats.org/officeDocument/2006/relationships" id="261" r:id="Rae42dd5a8f8c49cd"/>
-    <p:sldId xmlns:r="http://schemas.openxmlformats.org/officeDocument/2006/relationships" id="262" r:id="Raafa4b1ad72f4e7a"/>
-    <p:sldId xmlns:r="http://schemas.openxmlformats.org/officeDocument/2006/relationships" id="263" r:id="R0e8578e14f5a4dbf"/>
-    <p:sldId xmlns:r="http://schemas.openxmlformats.org/officeDocument/2006/relationships" id="264" r:id="R9a0e0ee0613d4fc2"/>
+    <p:sldId xmlns:r="http://schemas.openxmlformats.org/officeDocument/2006/relationships" id="256" r:id="R326ba4abf3ec495b"/>
+    <p:sldId xmlns:r="http://schemas.openxmlformats.org/officeDocument/2006/relationships" id="257" r:id="R46be80c106e941bb"/>
+    <p:sldId xmlns:r="http://schemas.openxmlformats.org/officeDocument/2006/relationships" id="258" r:id="R373a2c8d2c4f46b4"/>
+    <p:sldId xmlns:r="http://schemas.openxmlformats.org/officeDocument/2006/relationships" id="259" r:id="Rea6fbe9e476549e8"/>
+    <p:sldId xmlns:r="http://schemas.openxmlformats.org/officeDocument/2006/relationships" id="260" r:id="R0996fbe129a74797"/>
+    <p:sldId xmlns:r="http://schemas.openxmlformats.org/officeDocument/2006/relationships" id="261" r:id="R8a87e2fb4ffd42ee"/>
+    <p:sldId xmlns:r="http://schemas.openxmlformats.org/officeDocument/2006/relationships" id="262" r:id="Rc6d1d837b00744f2"/>
+    <p:sldId xmlns:r="http://schemas.openxmlformats.org/officeDocument/2006/relationships" id="263" r:id="Red202bf4d0a14d4d"/>
+    <p:sldId xmlns:r="http://schemas.openxmlformats.org/officeDocument/2006/relationships" id="264" r:id="R0ab95662c09e43ab"/>
   </p:sldIdLst>
   <p:sldSz cx="12192000" cy="6858000"/>
   <p:notesSz cx="6858000" cy="9144000"/>
@@ -455,7 +455,7 @@
           </a:p>
           <a:p xmlns:a="http://schemas.openxmlformats.org/drawingml/2006/main">
             <a:r>
-              <a:t>Источники: финальный notebook Avangard_ticket_demand.ipynb; локальные audit_results.json, audit_window_results.csv, ERROR_ANALYSIS.md; docs/EXPERIMENTS.md. Сценарная оценка по прямому поручению HANDOFF, не S_plain.</a:t>
+              <a:t>Источники: финальный notebook Avangard_ticket_demand.ipynb; локальные audit_results.json, audit_window_results.csv, ERROR_ANALYSIS.md; docs/EXPERIMENTS.md. Сценарная оценка R/S из docs/PROTOCOL.md. Объяснение частей модели: DEMAND_FACTORS.md и analyze_demand_factors.py.</a:t>
             </a:r>
           </a:p>
         </p:txBody>
@@ -525,12 +525,12 @@
           <a:lstStyle xmlns:a="http://schemas.openxmlformats.org/drawingml/2006/main"/>
           <a:p xmlns:a="http://schemas.openxmlformats.org/drawingml/2006/main">
             <a:r>
-              <a:t>Григорий,0:25–1:00. В истории 85 завершённых домашних матчей; в тесте 17. У 6 будущих матчей продажи открыты,11 ещё без продаж. Абонементы не входят в целевую величину. Никаких внешних данных и сведений о ценах мы не добавляли.</a:t>
+              <a:t>Григорий,0:25–1:00. Используем85 завершённых матчей и расписание17 будущих. Основа модели - уровень зоны и сезона; Ridge уточняет его календарём и соперником. Для открытых продаж используем ранний темп.</a:t>
             </a:r>
           </a:p>
           <a:p xmlns:a="http://schemas.openxmlformats.org/drawingml/2006/main">
             <a:r>
-              <a:t>Источники: финальный notebook Avangard_ticket_demand.ipynb; локальные audit_results.json, audit_window_results.csv, ERROR_ANALYSIS.md; docs/EXPERIMENTS.md. Сценарная оценка по прямому поручению HANDOFF, не S_plain.</a:t>
+              <a:t>Источники: финальный notebook Avangard_ticket_demand.ipynb; локальные audit_results.json, audit_window_results.csv, ERROR_ANALYSIS.md; docs/EXPERIMENTS.md. Сценарная оценка R/S из docs/PROTOCOL.md. Объяснение частей модели: DEMAND_FACTORS.md и analyze_demand_factors.py.</a:t>
             </a:r>
           </a:p>
         </p:txBody>
@@ -600,12 +600,12 @@
           <a:lstStyle xmlns:a="http://schemas.openxmlformats.org/drawingml/2006/main"/>
           <a:p xmlns:a="http://schemas.openxmlformats.org/drawingml/2006/main">
             <a:r>
-              <a:t>Григорий,1:00–1:45. Сначала берём уровень продаж зоны и сезона. Когда игр мало, осторожно приближаем его к общей истории зоны: prior = 8. Ridge - линейная регрессия со штрафом за слишком большие поправки,alpha = 10. С ранними продажами применяем половину поправки темпа. Вес 0.5 закреплён по исторической проверке.</a:t>
+              <a:t>Григорий,1:00–1:50. Главная шкала нашего прогноза - различия между зонами. Типичная величина базового вклада156 билетов, сезонной поправки33. Соперник и день недели дают более умеренные поправки,20 и16 билетов. Это описание фиксированной модели до учёта своих продаж на85 исторических матчах, не причинная важность и не улучшение RMSE. Размеры зон различаются.</a:t>
             </a:r>
           </a:p>
           <a:p xmlns:a="http://schemas.openxmlformats.org/drawingml/2006/main">
             <a:r>
-              <a:t>Источники: финальный notebook Avangard_ticket_demand.ipynb; локальные audit_results.json, audit_window_results.csv, ERROR_ANALYSIS.md; docs/EXPERIMENTS.md. Сценарная оценка по прямому поручению HANDOFF, не S_plain.</a:t>
+              <a:t>Источники: финальный notebook Avangard_ticket_demand.ipynb; локальные audit_results.json, audit_window_results.csv, ERROR_ANALYSIS.md; docs/EXPERIMENTS.md. Сценарная оценка R/S из docs/PROTOCOL.md. Объяснение частей модели: DEMAND_FACTORS.md и analyze_demand_factors.py.</a:t>
             </a:r>
           </a:p>
         </p:txBody>
@@ -675,12 +675,12 @@
           <a:lstStyle xmlns:a="http://schemas.openxmlformats.org/drawingml/2006/main"/>
           <a:p xmlns:a="http://schemas.openxmlformats.org/drawingml/2006/main">
             <a:r>
-              <a:t>Захар,1:45–2:25. Проверяем последовательно три блока по 17 матчей. Для каждого прогнозируемого утра берём только завершённые матчи до начала блока. Ни один матч блока не пополняет обучение. Два среза продаж - повторные наблюдения одного матча, их веса суммируются в 1. Все окна использованы для выбора: отдельного независимого экзамена нет.</a:t>
+              <a:t>Захар,1:50–2:30. RMSE - ошибка в билетах, большие промахи штрафуются сильнее. R - одна общая ошибка окна с двумя сценариями. S - наш сводный балл трёх окон для сравнения и принятия кандидатов, а не метрика скрытого теста. Проверяем по времени; история завершена до отсечки, все зоны вместе.</a:t>
             </a:r>
           </a:p>
           <a:p xmlns:a="http://schemas.openxmlformats.org/drawingml/2006/main">
             <a:r>
-              <a:t>Источники: финальный notebook Avangard_ticket_demand.ipynb; локальные audit_results.json, audit_window_results.csv, ERROR_ANALYSIS.md; docs/EXPERIMENTS.md. Сценарная оценка по прямому поручению HANDOFF, не S_plain.</a:t>
+              <a:t>Источники: финальный notebook Avangard_ticket_demand.ipynb; локальные audit_results.json, audit_window_results.csv, ERROR_ANALYSIS.md; docs/EXPERIMENTS.md. Сценарная оценка R/S из docs/PROTOCOL.md. Объяснение частей модели: DEMAND_FACTORS.md и analyze_demand_factors.py.</a:t>
             </a:r>
           </a:p>
         </p:txBody>
@@ -750,12 +750,12 @@
           <a:lstStyle xmlns:a="http://schemas.openxmlformats.org/drawingml/2006/main"/>
           <a:p xmlns:a="http://schemas.openxmlformats.org/drawingml/2006/main">
             <a:r>
-              <a:t>Захар,2:25–3:15. Baseline - среднее зоны по доступным завершённым матчам. На тех же примерах итоговая S 126.736 против 139.155, снижение 8.92%. Таблица содержит RMSE обоих сценариев и смешанную R каждого окна. Первая проверка без продаж слегка хуже baseline, 0.29 билета: это не универсальный выигрыш. Сценарные S 132.941/143.913 и 114.459/129.748.</a:t>
+              <a:t>Захар,2:30–3:20. Baseline - среднее зоны по доступным завершённым матчам. На тех же примерах итоговая S 126.736 против 139.155, снижение 8.92%. Таблица содержит RMSE обоих сценариев и смешанную R каждого окна. Первая проверка без продаж слегка хуже baseline, 0.29 билета: это не универсальный выигрыш. Сравниваем baseline и модель внутри каждого сценария на одинаковых примерах; разницу между сценариями не объявляем пользой продаж.</a:t>
             </a:r>
           </a:p>
           <a:p xmlns:a="http://schemas.openxmlformats.org/drawingml/2006/main">
             <a:r>
-              <a:t>Источники: финальный notebook Avangard_ticket_demand.ipynb; локальные audit_results.json, audit_window_results.csv, ERROR_ANALYSIS.md; docs/EXPERIMENTS.md. Сценарная оценка по прямому поручению HANDOFF, не S_plain.</a:t>
+              <a:t>Источники: финальный notebook Avangard_ticket_demand.ipynb; локальные audit_results.json, audit_window_results.csv, ERROR_ANALYSIS.md; docs/EXPERIMENTS.md. Сценарная оценка R/S из docs/PROTOCOL.md. Объяснение частей модели: DEMAND_FACTORS.md и analyze_demand_factors.py.</a:t>
             </a:r>
           </a:p>
         </p:txBody>
@@ -825,12 +825,12 @@
           <a:lstStyle xmlns:a="http://schemas.openxmlformats.org/drawingml/2006/main"/>
           <a:p xmlns:a="http://schemas.openxmlformats.org/drawingml/2006/main">
             <a:r>
-              <a:t>Захар,3:15–4:00. Слева S каждой зоны по той же формуле, что общая S. Справа диагностическая RMSE по сценариям, матчи равновесны без весов окон. Самая большая абсолютная ошибка у зоны 6; модель снизила её, но в зонах 1 и 3 хуже среднего. Абсолютная ошибка не является процентом заполнения. Размеры одинаковы для всех зон: 51 и 36 уникальных матчей.</a:t>
+              <a:t>Захар,3:20–4:00. Слева S каждой зоны по той же формуле, что общая S. Справа диагностическая RMSE по сценариям, матчи равновесны без весов окон. Самая большая абсолютная ошибка у зоны 6; модель снизила её, но в зонах 1 и 3 хуже среднего. Абсолютная ошибка не является процентом заполнения. Размеры одинаковы для всех зон: 51 и 36 уникальных матчей.</a:t>
             </a:r>
           </a:p>
           <a:p xmlns:a="http://schemas.openxmlformats.org/drawingml/2006/main">
             <a:r>
-              <a:t>Источники: финальный notebook Avangard_ticket_demand.ipynb; локальные audit_results.json, audit_window_results.csv, ERROR_ANALYSIS.md; docs/EXPERIMENTS.md. Сценарная оценка по прямому поручению HANDOFF, не S_plain.</a:t>
+              <a:t>Источники: финальный notebook Avangard_ticket_demand.ipynb; локальные audit_results.json, audit_window_results.csv, ERROR_ANALYSIS.md; docs/EXPERIMENTS.md. Сценарная оценка R/S из docs/PROTOCOL.md. Объяснение частей модели: DEMAND_FACTORS.md и analyze_demand_factors.py.</a:t>
             </a:r>
           </a:p>
         </p:txBody>
@@ -905,7 +905,7 @@
           </a:p>
           <a:p xmlns:a="http://schemas.openxmlformats.org/drawingml/2006/main">
             <a:r>
-              <a:t>Источники: финальный notebook Avangard_ticket_demand.ipynb; локальные audit_results.json, audit_window_results.csv, ERROR_ANALYSIS.md; docs/EXPERIMENTS.md. Сценарная оценка по прямому поручению HANDOFF, не S_plain.</a:t>
+              <a:t>Источники: финальный notebook Avangard_ticket_demand.ipynb; локальные audit_results.json, audit_window_results.csv, ERROR_ANALYSIS.md; docs/EXPERIMENTS.md. Сценарная оценка R/S из docs/PROTOCOL.md. Объяснение частей модели: DEMAND_FACTORS.md и analyze_demand_factors.py.</a:t>
             </a:r>
           </a:p>
         </p:txBody>
@@ -975,12 +975,12 @@
           <a:lstStyle xmlns:a="http://schemas.openxmlformats.org/drawingml/2006/main"/>
           <a:p xmlns:a="http://schemas.openxmlformats.org/drawingml/2006/main">
             <a:r>
-              <a:t>Всеволод,4:45–5:20. КХЛ и покупки абонементов проверяли отдельно и не приняли. Их S выше принятой, улучшилось только одно окно. Относительная Ridge с внутренним подбором дала меньшую S, но выигрыш 0.61% ниже порога 2% и лучше лишь одно окно. Мы не называем принятую модель лучшей среди всех чисел.</a:t>
+              <a:t>Всеволод,4:45–5:15. КХЛ и покупки абонементов проверяли отдельно и не приняли. Их S выше принятой, улучшилось только одно окно. Относительная Ridge с внутренним подбором дала меньшую S, но выигрыш 0.61% ниже порога 2% и лучше лишь одно окно. Мы не называем принятую модель лучшей среди всех чисел.</a:t>
             </a:r>
           </a:p>
           <a:p xmlns:a="http://schemas.openxmlformats.org/drawingml/2006/main">
             <a:r>
-              <a:t>Источники: финальный notebook Avangard_ticket_demand.ipynb; локальные audit_results.json, audit_window_results.csv, ERROR_ANALYSIS.md; docs/EXPERIMENTS.md. Сценарная оценка по прямому поручению HANDOFF, не S_plain.</a:t>
+              <a:t>Источники: финальный notebook Avangard_ticket_demand.ipynb; локальные audit_results.json, audit_window_results.csv, ERROR_ANALYSIS.md; docs/EXPERIMENTS.md. Сценарная оценка R/S из docs/PROTOCOL.md. Объяснение частей модели: DEMAND_FACTORS.md и analyze_demand_factors.py.</a:t>
             </a:r>
           </a:p>
         </p:txBody>
@@ -1050,12 +1050,12 @@
           <a:lstStyle xmlns:a="http://schemas.openxmlformats.org/drawingml/2006/main"/>
           <a:p xmlns:a="http://schemas.openxmlformats.org/drawingml/2006/main">
             <a:r>
-              <a:t>Всеволод,5:20–6:15. До открытия используем прогноз для предварительного плана, после открытия пересчитываем на фиксированных сроках. Там, где ошибки выше, добавляем ручную проверку. Приоритеты продвижения проверяем на контрольной группе. Не обещаем прирост продаж или денег:цены и эффект кампаний не измерялись. Спасибо, готовы к вопросам.</a:t>
+              <a:t>Всеволод,5:15–6:15. Основной план строить по зонам и сезону. Соперник и день недели дают умеренные уточнения, поэтому не распределять продвижение только по этим категориям. Рекламный эффект проверять контрольной группой. В зонах1,3 и6 проверять отклонения. Пересчёты после открытия сравнивать на тех же матчах. Цены и денежный эффект не измерены.</a:t>
             </a:r>
           </a:p>
           <a:p xmlns:a="http://schemas.openxmlformats.org/drawingml/2006/main">
             <a:r>
-              <a:t>Источники: финальный notebook Avangard_ticket_demand.ipynb; локальные audit_results.json, audit_window_results.csv, ERROR_ANALYSIS.md; docs/EXPERIMENTS.md. Сценарная оценка по прямому поручению HANDOFF, не S_plain.</a:t>
+              <a:t>Источники: финальный notebook Avangard_ticket_demand.ipynb; локальные audit_results.json, audit_window_results.csv, ERROR_ANALYSIS.md; docs/EXPERIMENTS.md. Сценарная оценка R/S из docs/PROTOCOL.md. Объяснение частей модели: DEMAND_FACTORS.md и analyze_demand_factors.py.</a:t>
             </a:r>
           </a:p>
         </p:txBody>
@@ -1102,7 +1102,7 @@
           <p:cNvPr id="3" name="Title">
             <a:extLst xmlns:a="http://schemas.openxmlformats.org/drawingml/2006/main">
               <a:ext uri="{FF2B5EF4-FFF2-40B4-BE49-F238E27FC236}">
-                <a16:creationId xmlns:a16="http://schemas.microsoft.com/office/drawing/2014/main" id="{BDB9CE36-3079-4AB1-AFF9-015B78974E5E}"/>
+                <a16:creationId xmlns:a16="http://schemas.microsoft.com/office/drawing/2014/main" id="{1E51F554-D2CA-4C31-9A08-FFFD2B644E75}"/>
               </a:ext>
             </a:extLst>
           </p:cNvPr>
@@ -1259,7 +1259,7 @@
           <p:cNvPr id="2" name="Subtitle">
             <a:extLst xmlns:a="http://schemas.openxmlformats.org/drawingml/2006/main">
               <a:ext uri="{FF2B5EF4-FFF2-40B4-BE49-F238E27FC236}">
-                <a16:creationId xmlns:a16="http://schemas.microsoft.com/office/drawing/2014/main" id="{4EDB73BE-549F-44F6-B1E4-00A67A773419}"/>
+                <a16:creationId xmlns:a16="http://schemas.microsoft.com/office/drawing/2014/main" id="{37CB6DA0-AC80-41FD-9D59-EF5791AAF6C3}"/>
               </a:ext>
             </a:extLst>
           </p:cNvPr>
@@ -1433,7 +1433,7 @@
           <p:cNvPr id="2" name="Section title">
             <a:extLst xmlns:a="http://schemas.openxmlformats.org/drawingml/2006/main">
               <a:ext uri="{FF2B5EF4-FFF2-40B4-BE49-F238E27FC236}">
-                <a16:creationId xmlns:a16="http://schemas.microsoft.com/office/drawing/2014/main" id="{7EB81BC1-C9C4-4CA6-8FAB-0961A0879522}"/>
+                <a16:creationId xmlns:a16="http://schemas.microsoft.com/office/drawing/2014/main" id="{560ED2C8-5367-44C0-9CFF-C1470B36F690}"/>
               </a:ext>
             </a:extLst>
           </p:cNvPr>
@@ -1607,7 +1607,7 @@
           <p:cNvPr id="3" name="Title">
             <a:extLst xmlns:a="http://schemas.openxmlformats.org/drawingml/2006/main">
               <a:ext uri="{FF2B5EF4-FFF2-40B4-BE49-F238E27FC236}">
-                <a16:creationId xmlns:a16="http://schemas.microsoft.com/office/drawing/2014/main" id="{CBC05D0E-7904-489D-8F45-70883C7B2AAB}"/>
+                <a16:creationId xmlns:a16="http://schemas.microsoft.com/office/drawing/2014/main" id="{FB09DC0D-3B78-42DD-9C23-D8CAEB4E3BC5}"/>
               </a:ext>
             </a:extLst>
           </p:cNvPr>
@@ -1764,7 +1764,7 @@
           <p:cNvPr id="2" name="Body">
             <a:extLst xmlns:a="http://schemas.openxmlformats.org/drawingml/2006/main">
               <a:ext uri="{FF2B5EF4-FFF2-40B4-BE49-F238E27FC236}">
-                <a16:creationId xmlns:a16="http://schemas.microsoft.com/office/drawing/2014/main" id="{B6313C9D-0409-4CE7-97E4-2E44CBCDA00D}"/>
+                <a16:creationId xmlns:a16="http://schemas.microsoft.com/office/drawing/2014/main" id="{F9D6EC46-EE14-45B0-9111-B81D7C23A5A5}"/>
               </a:ext>
             </a:extLst>
           </p:cNvPr>
@@ -1938,7 +1938,7 @@
           <p:cNvPr id="4" name="Title">
             <a:extLst xmlns:a="http://schemas.openxmlformats.org/drawingml/2006/main">
               <a:ext uri="{FF2B5EF4-FFF2-40B4-BE49-F238E27FC236}">
-                <a16:creationId xmlns:a16="http://schemas.microsoft.com/office/drawing/2014/main" id="{1C5B42EE-7C0C-464A-93E6-73ABCBA0AD40}"/>
+                <a16:creationId xmlns:a16="http://schemas.microsoft.com/office/drawing/2014/main" id="{08770A80-EB53-4D89-9F32-AD4690D6E9A9}"/>
               </a:ext>
             </a:extLst>
           </p:cNvPr>
@@ -2095,7 +2095,7 @@
           <p:cNvPr id="2" name="Left column">
             <a:extLst xmlns:a="http://schemas.openxmlformats.org/drawingml/2006/main">
               <a:ext uri="{FF2B5EF4-FFF2-40B4-BE49-F238E27FC236}">
-                <a16:creationId xmlns:a16="http://schemas.microsoft.com/office/drawing/2014/main" id="{9D056716-D263-4A12-BE5E-EB9C420F44AC}"/>
+                <a16:creationId xmlns:a16="http://schemas.microsoft.com/office/drawing/2014/main" id="{CA22C324-7F1F-4F51-B62E-57D1F67673E0}"/>
               </a:ext>
             </a:extLst>
           </p:cNvPr>
@@ -2252,7 +2252,7 @@
           <p:cNvPr id="3" name="Right column">
             <a:extLst xmlns:a="http://schemas.openxmlformats.org/drawingml/2006/main">
               <a:ext uri="{FF2B5EF4-FFF2-40B4-BE49-F238E27FC236}">
-                <a16:creationId xmlns:a16="http://schemas.microsoft.com/office/drawing/2014/main" id="{81466DCB-676B-4074-A36E-67E511732E88}"/>
+                <a16:creationId xmlns:a16="http://schemas.microsoft.com/office/drawing/2014/main" id="{82CC3318-56D5-4B63-B40A-A70C8DEF689B}"/>
               </a:ext>
             </a:extLst>
           </p:cNvPr>
@@ -2426,7 +2426,7 @@
           <p:cNvPr id="3" name="Title">
             <a:extLst xmlns:a="http://schemas.openxmlformats.org/drawingml/2006/main">
               <a:ext uri="{FF2B5EF4-FFF2-40B4-BE49-F238E27FC236}">
-                <a16:creationId xmlns:a16="http://schemas.microsoft.com/office/drawing/2014/main" id="{46B59671-3B57-434C-94BB-C1A5D86396DE}"/>
+                <a16:creationId xmlns:a16="http://schemas.microsoft.com/office/drawing/2014/main" id="{8A92B273-3C12-41E2-9AE1-E5CEDFD2868A}"/>
               </a:ext>
             </a:extLst>
           </p:cNvPr>
@@ -2583,7 +2583,7 @@
           <p:cNvPr id="2" name="Left column">
             <a:extLst xmlns:a="http://schemas.openxmlformats.org/drawingml/2006/main">
               <a:ext uri="{FF2B5EF4-FFF2-40B4-BE49-F238E27FC236}">
-                <a16:creationId xmlns:a16="http://schemas.microsoft.com/office/drawing/2014/main" id="{BC2CBBA4-4F20-4553-AFB7-50E53890D5BC}"/>
+                <a16:creationId xmlns:a16="http://schemas.microsoft.com/office/drawing/2014/main" id="{BC41D3C7-20AF-477C-AF98-67D9C7654844}"/>
               </a:ext>
             </a:extLst>
           </p:cNvPr>
@@ -2778,12 +2778,12 @@
   </p:cSld>
   <p:clrMap bg1="lt1" tx1="dk1" bg2="lt2" tx2="dk2" accent1="accent1" accent2="accent2" accent3="accent3" accent4="accent4" accent5="accent5" accent6="accent6" hlink="hlink" folHlink="folHlink"/>
   <p:sldLayoutIdLst>
-    <p:sldLayoutId xmlns:r="http://schemas.openxmlformats.org/officeDocument/2006/relationships" id="2147483649" r:id="Ra7157748723a4e40"/>
-    <p:sldLayoutId xmlns:r="http://schemas.openxmlformats.org/officeDocument/2006/relationships" id="2147483650" r:id="R3d1c059a8c254dbf"/>
-    <p:sldLayoutId xmlns:r="http://schemas.openxmlformats.org/officeDocument/2006/relationships" id="2147483651" r:id="Rd90f6f0c114140ec"/>
-    <p:sldLayoutId xmlns:r="http://schemas.openxmlformats.org/officeDocument/2006/relationships" id="2147483652" r:id="R3b8810c71b9b407c"/>
-    <p:sldLayoutId xmlns:r="http://schemas.openxmlformats.org/officeDocument/2006/relationships" id="2147483653" r:id="R8c9217d9cf1844fc"/>
-    <p:sldLayoutId xmlns:r="http://schemas.openxmlformats.org/officeDocument/2006/relationships" id="2147483654" r:id="Rcea22ae84dd54923"/>
+    <p:sldLayoutId xmlns:r="http://schemas.openxmlformats.org/officeDocument/2006/relationships" id="2147483649" r:id="R1337265bd9f14b7e"/>
+    <p:sldLayoutId xmlns:r="http://schemas.openxmlformats.org/officeDocument/2006/relationships" id="2147483650" r:id="R8da12be7cddb4926"/>
+    <p:sldLayoutId xmlns:r="http://schemas.openxmlformats.org/officeDocument/2006/relationships" id="2147483651" r:id="R01e98b5a739646c4"/>
+    <p:sldLayoutId xmlns:r="http://schemas.openxmlformats.org/officeDocument/2006/relationships" id="2147483652" r:id="R52fbaf81ba374578"/>
+    <p:sldLayoutId xmlns:r="http://schemas.openxmlformats.org/officeDocument/2006/relationships" id="2147483653" r:id="R84f3f0dbc71e48ef"/>
+    <p:sldLayoutId xmlns:r="http://schemas.openxmlformats.org/officeDocument/2006/relationships" id="2147483654" r:id="R335fecd6e82f413d"/>
   </p:sldLayoutIdLst>
   <p:txStyles>
     <p:titleStyle>
@@ -3675,7 +3675,7 @@
           <p:cNvPr id="8" name="Прогноз спроса на билеты&#10;ХК «Авангард»">
             <a:extLst xmlns:a="http://schemas.openxmlformats.org/drawingml/2006/main">
               <a:ext uri="{FF2B5EF4-FFF2-40B4-BE49-F238E27FC236}">
-                <a16:creationId xmlns:a16="http://schemas.microsoft.com/office/drawing/2014/main" id="{5D3FA338-D1C6-409F-B39D-0D1A0995717D}"/>
+                <a16:creationId xmlns:a16="http://schemas.microsoft.com/office/drawing/2014/main" id="{DA40C448-2053-4DB7-A9EC-546A82BB6B71}"/>
               </a:ext>
             </a:extLst>
           </p:cNvPr>
@@ -3766,7 +3766,7 @@
           <p:cNvPr id="2" name="СпускоГрад  /  DATA MATCH">
             <a:extLst xmlns:a="http://schemas.openxmlformats.org/drawingml/2006/main">
               <a:ext uri="{FF2B5EF4-FFF2-40B4-BE49-F238E27FC236}">
-                <a16:creationId xmlns:a16="http://schemas.microsoft.com/office/drawing/2014/main" id="{6B2E1DD9-02B2-4C90-AFA2-61EFC1A2EA41}"/>
+                <a16:creationId xmlns:a16="http://schemas.microsoft.com/office/drawing/2014/main" id="{1EB01C2D-67EB-4359-80D9-12D71E61EEE8}"/>
               </a:ext>
             </a:extLst>
           </p:cNvPr>
@@ -3834,7 +3834,7 @@
           <p:cNvPr id="3" name="01">
             <a:extLst xmlns:a="http://schemas.openxmlformats.org/drawingml/2006/main">
               <a:ext uri="{FF2B5EF4-FFF2-40B4-BE49-F238E27FC236}">
-                <a16:creationId xmlns:a16="http://schemas.microsoft.com/office/drawing/2014/main" id="{219F4B47-AB24-4524-BAC6-26788C19F7A8}"/>
+                <a16:creationId xmlns:a16="http://schemas.microsoft.com/office/drawing/2014/main" id="{BA243199-D4F4-4D18-B1A5-3F9FD994AD2B}"/>
               </a:ext>
             </a:extLst>
           </p:cNvPr>
@@ -3902,7 +3902,7 @@
           <p:cNvPr id="4" name="17 матчей × 8 зон = 136 прогнозов">
             <a:extLst xmlns:a="http://schemas.openxmlformats.org/drawingml/2006/main">
               <a:ext uri="{FF2B5EF4-FFF2-40B4-BE49-F238E27FC236}">
-                <a16:creationId xmlns:a16="http://schemas.microsoft.com/office/drawing/2014/main" id="{023180B6-1174-4374-B158-4649666AFD18}"/>
+                <a16:creationId xmlns:a16="http://schemas.microsoft.com/office/drawing/2014/main" id="{CDAEB89F-3ECB-484E-9BBE-E2D708438678}"/>
               </a:ext>
             </a:extLst>
           </p:cNvPr>
@@ -3970,7 +3970,7 @@
           <p:cNvPr id="5" name="Команда «СпускоГрад»">
             <a:extLst xmlns:a="http://schemas.openxmlformats.org/drawingml/2006/main">
               <a:ext uri="{FF2B5EF4-FFF2-40B4-BE49-F238E27FC236}">
-                <a16:creationId xmlns:a16="http://schemas.microsoft.com/office/drawing/2014/main" id="{04622225-070C-4888-B55D-8C9F39E666A8}"/>
+                <a16:creationId xmlns:a16="http://schemas.microsoft.com/office/drawing/2014/main" id="{CB991A4F-24E7-4922-8E19-88B6C4AB645B}"/>
               </a:ext>
             </a:extLst>
           </p:cNvPr>
@@ -4038,7 +4038,7 @@
           <p:cNvPr id="6" name="Мирошниченко Григорий&#10;Кусков Захар&#10;Гутов Всев">
             <a:extLst xmlns:a="http://schemas.openxmlformats.org/drawingml/2006/main">
               <a:ext uri="{FF2B5EF4-FFF2-40B4-BE49-F238E27FC236}">
-                <a16:creationId xmlns:a16="http://schemas.microsoft.com/office/drawing/2014/main" id="{6ED343C9-9C77-45DE-8BFB-953CB11CCC8E}"/>
+                <a16:creationId xmlns:a16="http://schemas.microsoft.com/office/drawing/2014/main" id="{794328E2-4B53-4DB5-A485-9A979A472F45}"/>
               </a:ext>
             </a:extLst>
           </p:cNvPr>
@@ -4152,7 +4152,7 @@
           <p:cNvPr id="7" name="DATA MATCH  •  обычные билеты за весь период ">
             <a:extLst xmlns:a="http://schemas.openxmlformats.org/drawingml/2006/main">
               <a:ext uri="{FF2B5EF4-FFF2-40B4-BE49-F238E27FC236}">
-                <a16:creationId xmlns:a16="http://schemas.microsoft.com/office/drawing/2014/main" id="{4BB0F5E4-8027-449D-9060-21C5BE1B2BD2}"/>
+                <a16:creationId xmlns:a16="http://schemas.microsoft.com/office/drawing/2014/main" id="{D3ECA37A-30B6-4723-8B5C-B3684236B26F}"/>
               </a:ext>
             </a:extLst>
           </p:cNvPr>
@@ -4218,7 +4218,7 @@
     </p:spTree>
     <p:extLst>
       <p:ext uri="{BB962C8B-B14F-4D97-AF65-F5344CB8AC3E}">
-        <p14:creationId xmlns:p14="http://schemas.microsoft.com/office/powerpoint/2010/main" val="1527615153"/>
+        <p14:creationId xmlns:p14="http://schemas.microsoft.com/office/powerpoint/2010/main" val="641759959"/>
       </p:ext>
     </p:extLst>
   </p:cSld>
@@ -4246,10 +4246,10 @@
       </p:grpSpPr>
       <p:sp>
         <p:nvSpPr>
-          <p:cNvPr id="7" name="Данные и ограничения">
+          <p:cNvPr id="8" name="Данные и модель спроса">
             <a:extLst xmlns:a="http://schemas.openxmlformats.org/drawingml/2006/main">
               <a:ext uri="{FF2B5EF4-FFF2-40B4-BE49-F238E27FC236}">
-                <a16:creationId xmlns:a16="http://schemas.microsoft.com/office/drawing/2014/main" id="{1C55C777-5C5C-4BF9-917B-515AD58D4347}"/>
+                <a16:creationId xmlns:a16="http://schemas.microsoft.com/office/drawing/2014/main" id="{9EE357D0-3750-419A-AD6D-60B1990EFB91}"/>
               </a:ext>
             </a:extLst>
           </p:cNvPr>
@@ -4307,7 +4307,7 @@
                 <a:ea typeface="Arial"/>
                 <a:cs typeface="Arial"/>
               </a:rPr>
-              <a:t>Данные и ограничения</a:t>
+              <a:t>Данные и модель спроса</a:t>
             </a:r>
           </a:p>
         </p:txBody>
@@ -4317,7 +4317,7 @@
           <p:cNvPr id="2" name="СпускоГрад  /  DATA MATCH">
             <a:extLst xmlns:a="http://schemas.openxmlformats.org/drawingml/2006/main">
               <a:ext uri="{FF2B5EF4-FFF2-40B4-BE49-F238E27FC236}">
-                <a16:creationId xmlns:a16="http://schemas.microsoft.com/office/drawing/2014/main" id="{92902891-1D10-42A7-837D-AB0B113B1311}"/>
+                <a16:creationId xmlns:a16="http://schemas.microsoft.com/office/drawing/2014/main" id="{2B9AE934-D3C3-477D-B570-929A824E5F1D}"/>
               </a:ext>
             </a:extLst>
           </p:cNvPr>
@@ -4385,7 +4385,7 @@
           <p:cNvPr id="3" name="02">
             <a:extLst xmlns:a="http://schemas.openxmlformats.org/drawingml/2006/main">
               <a:ext uri="{FF2B5EF4-FFF2-40B4-BE49-F238E27FC236}">
-                <a16:creationId xmlns:a16="http://schemas.microsoft.com/office/drawing/2014/main" id="{0BBDD29D-6017-427B-A0DE-352454FBE256}"/>
+                <a16:creationId xmlns:a16="http://schemas.microsoft.com/office/drawing/2014/main" id="{D61FDA7D-A611-4FAA-B162-742C7D76F7FB}"/>
               </a:ext>
             </a:extLst>
           </p:cNvPr>
@@ -4453,7 +4453,7 @@
           <p:cNvPr id="4" name="">
             <a:extLst xmlns:a="http://schemas.openxmlformats.org/drawingml/2006/main">
               <a:ext uri="{FF2B5EF4-FFF2-40B4-BE49-F238E27FC236}">
-                <a16:creationId xmlns:a16="http://schemas.microsoft.com/office/drawing/2014/main" id="{65BD5609-7FB3-49DB-A738-776DC2DEAD73}"/>
+                <a16:creationId xmlns:a16="http://schemas.microsoft.com/office/drawing/2014/main" id="{26F85845-E92A-461E-AF19-AFB6FA061008}"/>
               </a:ext>
             </a:extLst>
           </p:cNvPr>
@@ -4461,25 +4461,25 @@
           <p:nvPr/>
         </p:nvGraphicFramePr>
         <p:xfrm>
-          <a:off xmlns:a="http://schemas.openxmlformats.org/drawingml/2006/main" x="523875" y="1419225"/>
-          <a:ext xmlns:a="http://schemas.openxmlformats.org/drawingml/2006/main" cx="11144250" cy="2571750"/>
+          <a:off xmlns:a="http://schemas.openxmlformats.org/drawingml/2006/main" x="523875" y="1390650"/>
+          <a:ext xmlns:a="http://schemas.openxmlformats.org/drawingml/2006/main" cx="11144250" cy="2324100"/>
         </p:xfrm>
         <a:graphic xmlns:a="http://schemas.openxmlformats.org/drawingml/2006/main">
           <a:graphicData uri="http://schemas.openxmlformats.org/drawingml/2006/table">
             <a:tbl>
               <a:tblPr/>
               <a:tblGrid>
-                <a:gridCol w="4476750"/>
-                <a:gridCol w="6667500"/>
+                <a:gridCol w="4762500"/>
+                <a:gridCol w="6381750"/>
               </a:tblGrid>
-              <a:tr h="642938">
-                <a:tc>
-                  <a:txBody>
-                    <a:bodyPr/>
-                    <a:lstStyle/>
-                    <a:p>
-                      <a:r>
-                        <a:rPr sz="2100" b="1">
+              <a:tr h="581025">
+                <a:tc>
+                  <a:txBody>
+                    <a:bodyPr/>
+                    <a:lstStyle/>
+                    <a:p>
+                      <a:r>
+                        <a:rPr sz="2025" b="1">
                           <a:solidFill>
                             <a:srgbClr val="FFFFFF"/>
                           </a:solidFill>
@@ -4487,7 +4487,7 @@
                           <a:ea typeface="Arial"/>
                           <a:cs typeface="Arial"/>
                         </a:rPr>
-                        <a:t>Источник</a:t>
+                        <a:t>Данные</a:t>
                       </a:r>
                     </a:p>
                   </a:txBody>
@@ -4503,7 +4503,7 @@
                     <a:lstStyle/>
                     <a:p>
                       <a:r>
-                        <a:rPr sz="2100" b="1">
+                        <a:rPr sz="2025" b="1">
                           <a:solidFill>
                             <a:srgbClr val="FFFFFF"/>
                           </a:solidFill>
@@ -4511,7 +4511,7 @@
                           <a:ea typeface="Arial"/>
                           <a:cs typeface="Arial"/>
                         </a:rPr>
-                        <a:t>Для чего используем</a:t>
+                        <a:t>Задача</a:t>
                       </a:r>
                     </a:p>
                   </a:txBody>
@@ -4522,46 +4522,46 @@
                   </a:tcPr>
                 </a:tc>
               </a:tr>
-              <a:tr h="642938">
-                <a:tc>
-                  <a:txBody>
-                    <a:bodyPr/>
-                    <a:lstStyle/>
-                    <a:p>
-                      <a:r>
-                        <a:rPr sz="2100">
-                          <a:solidFill>
-                            <a:srgbClr val="15191F"/>
-                          </a:solidFill>
-                          <a:latin typeface="Arial"/>
-                          <a:ea typeface="Arial"/>
-                          <a:cs typeface="Arial"/>
-                        </a:rPr>
-                        <a:t>Расписание 102 матчей</a:t>
-                      </a:r>
-                    </a:p>
-                  </a:txBody>
-                  <a:tcPr marL="95250" marR="76200" marT="76200" marB="57150">
-                    <a:solidFill>
-                      <a:srgbClr val="FAF9F6"/>
-                    </a:solidFill>
-                  </a:tcPr>
-                </a:tc>
-                <a:tc>
-                  <a:txBody>
-                    <a:bodyPr/>
-                    <a:lstStyle/>
-                    <a:p>
-                      <a:r>
-                        <a:rPr sz="2100">
-                          <a:solidFill>
-                            <a:srgbClr val="15191F"/>
-                          </a:solidFill>
-                          <a:latin typeface="Arial"/>
-                          <a:ea typeface="Arial"/>
-                          <a:cs typeface="Arial"/>
-                        </a:rPr>
-                        <a:t>Сезон, соперник, дата и время</a:t>
+              <a:tr h="581025">
+                <a:tc>
+                  <a:txBody>
+                    <a:bodyPr/>
+                    <a:lstStyle/>
+                    <a:p>
+                      <a:r>
+                        <a:rPr sz="2025">
+                          <a:solidFill>
+                            <a:srgbClr val="15191F"/>
+                          </a:solidFill>
+                          <a:latin typeface="Arial"/>
+                          <a:ea typeface="Arial"/>
+                          <a:cs typeface="Arial"/>
+                        </a:rPr>
+                        <a:t>85 прошлых матчей</a:t>
+                      </a:r>
+                    </a:p>
+                  </a:txBody>
+                  <a:tcPr marL="95250" marR="76200" marT="76200" marB="57150">
+                    <a:solidFill>
+                      <a:srgbClr val="FAF9F6"/>
+                    </a:solidFill>
+                  </a:tcPr>
+                </a:tc>
+                <a:tc>
+                  <a:txBody>
+                    <a:bodyPr/>
+                    <a:lstStyle/>
+                    <a:p>
+                      <a:r>
+                        <a:rPr sz="2025">
+                          <a:solidFill>
+                            <a:srgbClr val="15191F"/>
+                          </a:solidFill>
+                          <a:latin typeface="Arial"/>
+                          <a:ea typeface="Arial"/>
+                          <a:cs typeface="Arial"/>
+                        </a:rPr>
+                        <a:t>Учимся на обычных билетах</a:t>
                       </a:r>
                     </a:p>
                   </a:txBody>
@@ -4572,46 +4572,46 @@
                   </a:tcPr>
                 </a:tc>
               </a:tr>
-              <a:tr h="642938">
-                <a:tc>
-                  <a:txBody>
-                    <a:bodyPr/>
-                    <a:lstStyle/>
-                    <a:p>
-                      <a:r>
-                        <a:rPr sz="2100">
-                          <a:solidFill>
-                            <a:srgbClr val="15191F"/>
-                          </a:solidFill>
-                          <a:latin typeface="Arial"/>
-                          <a:ea typeface="Arial"/>
-                          <a:cs typeface="Arial"/>
-                        </a:rPr>
-                        <a:t>Продажи 85 завершённых матчей</a:t>
-                      </a:r>
-                    </a:p>
-                  </a:txBody>
-                  <a:tcPr marL="95250" marR="76200" marT="76200" marB="57150">
-                    <a:solidFill>
-                      <a:srgbClr val="FAF9F6"/>
-                    </a:solidFill>
-                  </a:tcPr>
-                </a:tc>
-                <a:tc>
-                  <a:txBody>
-                    <a:bodyPr/>
-                    <a:lstStyle/>
-                    <a:p>
-                      <a:r>
-                        <a:rPr sz="2100">
-                          <a:solidFill>
-                            <a:srgbClr val="15191F"/>
-                          </a:solidFill>
-                          <a:latin typeface="Arial"/>
-                          <a:ea typeface="Arial"/>
-                          <a:cs typeface="Arial"/>
-                        </a:rPr>
-                        <a:t>Полный итог и ранний темп</a:t>
+              <a:tr h="581025">
+                <a:tc>
+                  <a:txBody>
+                    <a:bodyPr/>
+                    <a:lstStyle/>
+                    <a:p>
+                      <a:r>
+                        <a:rPr sz="2025">
+                          <a:solidFill>
+                            <a:srgbClr val="15191F"/>
+                          </a:solidFill>
+                          <a:latin typeface="Arial"/>
+                          <a:ea typeface="Arial"/>
+                          <a:cs typeface="Arial"/>
+                        </a:rPr>
+                        <a:t>17 будущих матчей × 8 зон</a:t>
+                      </a:r>
+                    </a:p>
+                  </a:txBody>
+                  <a:tcPr marL="95250" marR="76200" marT="76200" marB="57150">
+                    <a:solidFill>
+                      <a:srgbClr val="FAF9F6"/>
+                    </a:solidFill>
+                  </a:tcPr>
+                </a:tc>
+                <a:tc>
+                  <a:txBody>
+                    <a:bodyPr/>
+                    <a:lstStyle/>
+                    <a:p>
+                      <a:r>
+                        <a:rPr sz="2025">
+                          <a:solidFill>
+                            <a:srgbClr val="15191F"/>
+                          </a:solidFill>
+                          <a:latin typeface="Arial"/>
+                          <a:ea typeface="Arial"/>
+                          <a:cs typeface="Arial"/>
+                        </a:rPr>
+                        <a:t>136 полных итогов продаж</a:t>
                       </a:r>
                     </a:p>
                   </a:txBody>
@@ -4622,46 +4622,46 @@
                   </a:tcPr>
                 </a:tc>
               </a:tr>
-              <a:tr h="642938">
-                <a:tc>
-                  <a:txBody>
-                    <a:bodyPr/>
-                    <a:lstStyle/>
-                    <a:p>
-                      <a:r>
-                        <a:rPr sz="2100">
-                          <a:solidFill>
-                            <a:srgbClr val="15191F"/>
-                          </a:solidFill>
-                          <a:latin typeface="Arial"/>
-                          <a:ea typeface="Arial"/>
-                          <a:cs typeface="Arial"/>
-                        </a:rPr>
-                        <a:t>Параметры 8 зон</a:t>
-                      </a:r>
-                    </a:p>
-                  </a:txBody>
-                  <a:tcPr marL="95250" marR="76200" marT="76200" marB="57150">
-                    <a:solidFill>
-                      <a:srgbClr val="FAF9F6"/>
-                    </a:solidFill>
-                  </a:tcPr>
-                </a:tc>
-                <a:tc>
-                  <a:txBody>
-                    <a:bodyPr/>
-                    <a:lstStyle/>
-                    <a:p>
-                      <a:r>
-                        <a:rPr sz="2100">
-                          <a:solidFill>
-                            <a:srgbClr val="15191F"/>
-                          </a:solidFill>
-                          <a:latin typeface="Arial"/>
-                          <a:ea typeface="Arial"/>
-                          <a:cs typeface="Arial"/>
-                        </a:rPr>
-                        <a:t>Границы итогового прогноза</a:t>
+              <a:tr h="581025">
+                <a:tc>
+                  <a:txBody>
+                    <a:bodyPr/>
+                    <a:lstStyle/>
+                    <a:p>
+                      <a:r>
+                        <a:rPr sz="2025">
+                          <a:solidFill>
+                            <a:srgbClr val="15191F"/>
+                          </a:solidFill>
+                          <a:latin typeface="Arial"/>
+                          <a:ea typeface="Arial"/>
+                          <a:cs typeface="Arial"/>
+                        </a:rPr>
+                        <a:t>Срез утро 15.12.2025</a:t>
+                      </a:r>
+                    </a:p>
+                  </a:txBody>
+                  <a:tcPr marL="95250" marR="76200" marT="76200" marB="57150">
+                    <a:solidFill>
+                      <a:srgbClr val="FAF9F6"/>
+                    </a:solidFill>
+                  </a:tcPr>
+                </a:tc>
+                <a:tc>
+                  <a:txBody>
+                    <a:bodyPr/>
+                    <a:lstStyle/>
+                    <a:p>
+                      <a:r>
+                        <a:rPr sz="2025">
+                          <a:solidFill>
+                            <a:srgbClr val="15191F"/>
+                          </a:solidFill>
+                          <a:latin typeface="Arial"/>
+                          <a:ea typeface="Arial"/>
+                          <a:cs typeface="Arial"/>
+                        </a:rPr>
+                        <a:t>6 матчей с продажами, 11 без</a:t>
                       </a:r>
                     </a:p>
                   </a:txBody>
@@ -4678,10 +4678,10 @@
       </p:graphicFrame>
       <p:sp>
         <p:nvSpPr>
-          <p:cNvPr id="5" name="Срез test: утро 15.12.2025; продажи по 14.12 ">
+          <p:cNvPr id="5" name="Модель: уровень зоны и сезона + Ridge + 0.5 ×">
             <a:extLst xmlns:a="http://schemas.openxmlformats.org/drawingml/2006/main">
               <a:ext uri="{FF2B5EF4-FFF2-40B4-BE49-F238E27FC236}">
-                <a16:creationId xmlns:a16="http://schemas.microsoft.com/office/drawing/2014/main" id="{9C49F8F3-F1A9-493C-9CFF-69ADE0D5E273}"/>
+                <a16:creationId xmlns:a16="http://schemas.microsoft.com/office/drawing/2014/main" id="{E6AF5AF2-1C26-4A53-BDC1-E178209567E7}"/>
               </a:ext>
             </a:extLst>
           </p:cNvPr>
@@ -4692,8 +4692,8 @@
         </p:nvSpPr>
         <p:spPr>
           <a:xfrm xmlns:a="http://schemas.openxmlformats.org/drawingml/2006/main">
-            <a:off x="523875" y="4286250"/>
-            <a:ext cx="11049000" cy="400050"/>
+            <a:off x="523875" y="4038600"/>
+            <a:ext cx="11144250" cy="647700"/>
           </a:xfrm>
           <a:prstGeom xmlns:a="http://schemas.openxmlformats.org/drawingml/2006/main" prst="rect">
             <a:avLst/>
@@ -4709,7 +4709,7 @@
           </a:bodyPr>
           <a:lstStyle xmlns:a="http://schemas.openxmlformats.org/drawingml/2006/main">
             <a:defPPr>
-              <a:defRPr sz="2025" b="1">
+              <a:defRPr sz="2175" b="1">
                 <a:solidFill>
                   <a:srgbClr val="B62730"/>
                 </a:solidFill>
@@ -4721,7 +4721,7 @@
           </a:lstStyle>
           <a:p xmlns:a="http://schemas.openxmlformats.org/drawingml/2006/main">
             <a:pPr>
-              <a:defRPr sz="2025" b="1">
+              <a:defRPr sz="2175" b="1">
                 <a:solidFill>
                   <a:srgbClr val="B62730"/>
                 </a:solidFill>
@@ -4731,7 +4731,7 @@
               </a:defRPr>
             </a:pPr>
             <a:r>
-              <a:rPr sz="2025" b="1">
+              <a:rPr sz="2175" b="1">
                 <a:solidFill>
                   <a:srgbClr val="B62730"/>
                 </a:solidFill>
@@ -4739,17 +4739,17 @@
                 <a:ea typeface="Arial"/>
                 <a:cs typeface="Arial"/>
               </a:rPr>
-              <a:t>Срез test: утро 15.12.2025; продажи по 14.12 включительно</a:t>
+              <a:t>Модель: уровень зоны и сезона + Ridge + 0.5 × поправка продаж</a:t>
             </a:r>
           </a:p>
         </p:txBody>
       </p:sp>
       <p:sp>
         <p:nvSpPr>
-          <p:cNvPr id="6" name="6 матчей с продажами  /  11 без продаж&#10;КХЛ за">
+          <p:cNvPr id="6" name="Признаки: зона, соперник, день недели, месяц,">
             <a:extLst xmlns:a="http://schemas.openxmlformats.org/drawingml/2006/main">
               <a:ext uri="{FF2B5EF4-FFF2-40B4-BE49-F238E27FC236}">
-                <a16:creationId xmlns:a16="http://schemas.microsoft.com/office/drawing/2014/main" id="{A5F8D7A0-856E-4D02-9484-DE185431C1D0}"/>
+                <a16:creationId xmlns:a16="http://schemas.microsoft.com/office/drawing/2014/main" id="{E789D517-DBD8-46DD-A146-152E70B3974E}"/>
               </a:ext>
             </a:extLst>
           </p:cNvPr>
@@ -4760,8 +4760,8 @@
         </p:nvSpPr>
         <p:spPr>
           <a:xfrm xmlns:a="http://schemas.openxmlformats.org/drawingml/2006/main">
-            <a:off x="523875" y="4829175"/>
-            <a:ext cx="11049000" cy="1257300"/>
+            <a:off x="523875" y="4886325"/>
+            <a:ext cx="11144250" cy="790575"/>
           </a:xfrm>
           <a:prstGeom xmlns:a="http://schemas.openxmlformats.org/drawingml/2006/main" prst="rect">
             <a:avLst/>
@@ -4807,7 +4807,7 @@
                 <a:ea typeface="Arial"/>
                 <a:cs typeface="Arial"/>
               </a:rPr>
-              <a:t>6 матчей с продажами  /  11 без продаж</a:t>
+              <a:t>Признаки: зона, соперник, день недели, месяц, время, номер матча</a:t>
             </a:r>
           </a:p>
           <a:p xmlns:a="http://schemas.openxmlformats.org/drawingml/2006/main">
@@ -4830,14 +4830,59 @@
                 <a:ea typeface="Arial"/>
                 <a:cs typeface="Arial"/>
               </a:rPr>
-              <a:t>КХЛ заканчивается 19.11.2025 и не входит в принятую модель</a:t>
+              <a:t>Ridge ограничивает большие поправки; alpha = 10, prior сезона = 8</a:t>
             </a:r>
           </a:p>
+        </p:txBody>
+      </p:sp>
+      <p:sp>
+        <p:nvSpPr>
+          <p:cNvPr id="7" name="Прогноз обычных билетов ограничен уже проданн">
+            <a:extLst xmlns:a="http://schemas.openxmlformats.org/drawingml/2006/main">
+              <a:ext uri="{FF2B5EF4-FFF2-40B4-BE49-F238E27FC236}">
+                <a16:creationId xmlns:a16="http://schemas.microsoft.com/office/drawing/2014/main" id="{F84763FF-B4DE-4976-9B1D-EEDD1FD799F4}"/>
+              </a:ext>
+            </a:extLst>
+          </p:cNvPr>
+          <p:cNvSpPr>
+            <a:spLocks xmlns:a="http://schemas.openxmlformats.org/drawingml/2006/main" noGrp="1"/>
+          </p:cNvSpPr>
+          <p:nvPr/>
+        </p:nvSpPr>
+        <p:spPr>
+          <a:xfrm xmlns:a="http://schemas.openxmlformats.org/drawingml/2006/main">
+            <a:off x="523875" y="5934075"/>
+            <a:ext cx="11144250" cy="304800"/>
+          </a:xfrm>
+          <a:prstGeom xmlns:a="http://schemas.openxmlformats.org/drawingml/2006/main" prst="rect">
+            <a:avLst/>
+          </a:prstGeom>
+          <a:noFill xmlns:a="http://schemas.openxmlformats.org/drawingml/2006/main"/>
+          <a:ln xmlns:a="http://schemas.openxmlformats.org/drawingml/2006/main" w="0">
+            <a:noFill/>
+          </a:ln>
+        </p:spPr>
+        <p:txBody>
+          <a:bodyPr xmlns:a="http://schemas.openxmlformats.org/drawingml/2006/main" lIns="0" tIns="0" rIns="0" bIns="0">
+            <a:noAutofit/>
+          </a:bodyPr>
+          <a:lstStyle xmlns:a="http://schemas.openxmlformats.org/drawingml/2006/main">
+            <a:defPPr>
+              <a:defRPr sz="1725" b="0">
+                <a:solidFill>
+                  <a:srgbClr val="505C68"/>
+                </a:solidFill>
+                <a:latin typeface="Arial"/>
+                <a:ea typeface="Arial"/>
+                <a:cs typeface="Arial"/>
+              </a:defRPr>
+            </a:defPPr>
+          </a:lstStyle>
           <a:p xmlns:a="http://schemas.openxmlformats.org/drawingml/2006/main">
             <a:pPr>
-              <a:defRPr sz="1950" b="0">
-                <a:solidFill>
-                  <a:srgbClr val="15191F"/>
+              <a:defRPr sz="1725" b="0">
+                <a:solidFill>
+                  <a:srgbClr val="505C68"/>
                 </a:solidFill>
                 <a:latin typeface="Arial"/>
                 <a:ea typeface="Arial"/>
@@ -4845,15 +4890,15 @@
               </a:defRPr>
             </a:pPr>
             <a:r>
-              <a:rPr sz="1950" b="0">
-                <a:solidFill>
-                  <a:srgbClr val="15191F"/>
+              <a:rPr sz="1725" b="0">
+                <a:solidFill>
+                  <a:srgbClr val="505C68"/>
                 </a:solidFill>
                 <a:latin typeface="Arial"/>
                 <a:ea typeface="Arial"/>
                 <a:cs typeface="Arial"/>
               </a:rPr>
-              <a:t>Нет цен: нельзя оценить оптимальную цену или выручку</a:t>
+              <a:t>Прогноз обычных билетов ограничен уже проданным и доступными местами</a:t>
             </a:r>
           </a:p>
         </p:txBody>
@@ -4861,7 +4906,7 @@
     </p:spTree>
     <p:extLst>
       <p:ext uri="{BB962C8B-B14F-4D97-AF65-F5344CB8AC3E}">
-        <p14:creationId xmlns:p14="http://schemas.microsoft.com/office/powerpoint/2010/main" val="1184966326"/>
+        <p14:creationId xmlns:p14="http://schemas.microsoft.com/office/powerpoint/2010/main" val="1022229561"/>
       </p:ext>
     </p:extLst>
   </p:cSld>
@@ -4889,10 +4934,10 @@
       </p:grpSpPr>
       <p:sp>
         <p:nvSpPr>
-          <p:cNvPr id="10" name="Модель и признаки">
+          <p:cNvPr id="9" name="Что задаёт прогноз спроса">
             <a:extLst xmlns:a="http://schemas.openxmlformats.org/drawingml/2006/main">
               <a:ext uri="{FF2B5EF4-FFF2-40B4-BE49-F238E27FC236}">
-                <a16:creationId xmlns:a16="http://schemas.microsoft.com/office/drawing/2014/main" id="{F0C7031A-4577-4A6F-8B6D-C90C199B6683}"/>
+                <a16:creationId xmlns:a16="http://schemas.microsoft.com/office/drawing/2014/main" id="{49538E11-AD97-48B2-8049-C4C37BB04E95}"/>
               </a:ext>
             </a:extLst>
           </p:cNvPr>
@@ -4950,7 +4995,7 @@
                 <a:ea typeface="Arial"/>
                 <a:cs typeface="Arial"/>
               </a:rPr>
-              <a:t>Модель и признаки</a:t>
+              <a:t>Что задаёт прогноз спроса</a:t>
             </a:r>
           </a:p>
         </p:txBody>
@@ -4960,7 +5005,7 @@
           <p:cNvPr id="2" name="СпускоГрад  /  DATA MATCH">
             <a:extLst xmlns:a="http://schemas.openxmlformats.org/drawingml/2006/main">
               <a:ext uri="{FF2B5EF4-FFF2-40B4-BE49-F238E27FC236}">
-                <a16:creationId xmlns:a16="http://schemas.microsoft.com/office/drawing/2014/main" id="{DA3551A3-D382-450C-A76D-447537683CBC}"/>
+                <a16:creationId xmlns:a16="http://schemas.microsoft.com/office/drawing/2014/main" id="{3D729BED-B4D2-4C63-AB2B-2D2254C026FC}"/>
               </a:ext>
             </a:extLst>
           </p:cNvPr>
@@ -5028,7 +5073,7 @@
           <p:cNvPr id="3" name="03">
             <a:extLst xmlns:a="http://schemas.openxmlformats.org/drawingml/2006/main">
               <a:ext uri="{FF2B5EF4-FFF2-40B4-BE49-F238E27FC236}">
-                <a16:creationId xmlns:a16="http://schemas.microsoft.com/office/drawing/2014/main" id="{E635ABC2-E3C2-4952-8D45-810A959C8767}"/>
+                <a16:creationId xmlns:a16="http://schemas.microsoft.com/office/drawing/2014/main" id="{76565A4E-1085-42D4-8303-B4832DE1B2A9}"/>
               </a:ext>
             </a:extLst>
           </p:cNvPr>
@@ -5091,12 +5136,440 @@
           </a:p>
         </p:txBody>
       </p:sp>
+      <p:graphicFrame>
+        <p:nvGraphicFramePr>
+          <p:cNvPr id="4" name="">
+            <a:extLst xmlns:a="http://schemas.openxmlformats.org/drawingml/2006/main">
+              <a:ext uri="{FF2B5EF4-FFF2-40B4-BE49-F238E27FC236}">
+                <a16:creationId xmlns:a16="http://schemas.microsoft.com/office/drawing/2014/main" id="{8C9F56AD-A602-4BEF-8424-45F047F8E257}"/>
+              </a:ext>
+            </a:extLst>
+          </p:cNvPr>
+          <p:cNvGraphicFramePr/>
+          <p:nvPr/>
+        </p:nvGraphicFramePr>
+        <p:xfrm>
+          <a:off xmlns:a="http://schemas.openxmlformats.org/drawingml/2006/main" x="523875" y="1419225"/>
+          <a:ext xmlns:a="http://schemas.openxmlformats.org/drawingml/2006/main" cx="6305550" cy="3810000"/>
+        </p:xfrm>
+        <a:graphic xmlns:a="http://schemas.openxmlformats.org/drawingml/2006/main">
+          <a:graphicData uri="http://schemas.openxmlformats.org/drawingml/2006/table">
+            <a:tbl>
+              <a:tblPr/>
+              <a:tblGrid>
+                <a:gridCol w="4667250"/>
+                <a:gridCol w="1638300"/>
+              </a:tblGrid>
+              <a:tr h="476250">
+                <a:tc>
+                  <a:txBody>
+                    <a:bodyPr/>
+                    <a:lstStyle/>
+                    <a:p>
+                      <a:r>
+                        <a:rPr sz="1725" b="1">
+                          <a:solidFill>
+                            <a:srgbClr val="FFFFFF"/>
+                          </a:solidFill>
+                          <a:latin typeface="Arial"/>
+                          <a:ea typeface="Arial"/>
+                          <a:cs typeface="Arial"/>
+                        </a:rPr>
+                        <a:t>Часть модели</a:t>
+                      </a:r>
+                    </a:p>
+                  </a:txBody>
+                  <a:tcPr marL="95250" marR="76200" marT="76200" marB="57150">
+                    <a:solidFill>
+                      <a:srgbClr val="15191F"/>
+                    </a:solidFill>
+                  </a:tcPr>
+                </a:tc>
+                <a:tc>
+                  <a:txBody>
+                    <a:bodyPr/>
+                    <a:lstStyle/>
+                    <a:p>
+                      <a:r>
+                        <a:rPr sz="1725" b="1">
+                          <a:solidFill>
+                            <a:srgbClr val="FFFFFF"/>
+                          </a:solidFill>
+                          <a:latin typeface="Arial"/>
+                          <a:ea typeface="Arial"/>
+                          <a:cs typeface="Arial"/>
+                        </a:rPr>
+                        <a:t>Вклад, бил.</a:t>
+                      </a:r>
+                    </a:p>
+                  </a:txBody>
+                  <a:tcPr marL="95250" marR="76200" marT="76200" marB="57150">
+                    <a:solidFill>
+                      <a:srgbClr val="15191F"/>
+                    </a:solidFill>
+                  </a:tcPr>
+                </a:tc>
+              </a:tr>
+              <a:tr h="476250">
+                <a:tc>
+                  <a:txBody>
+                    <a:bodyPr/>
+                    <a:lstStyle/>
+                    <a:p>
+                      <a:r>
+                        <a:rPr sz="1725">
+                          <a:solidFill>
+                            <a:srgbClr val="15191F"/>
+                          </a:solidFill>
+                          <a:latin typeface="Arial"/>
+                          <a:ea typeface="Arial"/>
+                          <a:cs typeface="Arial"/>
+                        </a:rPr>
+                        <a:t>Базовый уровень зоны</a:t>
+                      </a:r>
+                    </a:p>
+                  </a:txBody>
+                  <a:tcPr marL="95250" marR="76200" marT="76200" marB="57150">
+                    <a:solidFill>
+                      <a:srgbClr val="FAF9F6"/>
+                    </a:solidFill>
+                  </a:tcPr>
+                </a:tc>
+                <a:tc>
+                  <a:txBody>
+                    <a:bodyPr/>
+                    <a:lstStyle/>
+                    <a:p>
+                      <a:r>
+                        <a:rPr sz="1725">
+                          <a:solidFill>
+                            <a:srgbClr val="15191F"/>
+                          </a:solidFill>
+                          <a:latin typeface="Arial"/>
+                          <a:ea typeface="Arial"/>
+                          <a:cs typeface="Arial"/>
+                        </a:rPr>
+                        <a:t>156.5</a:t>
+                      </a:r>
+                    </a:p>
+                  </a:txBody>
+                  <a:tcPr marL="95250" marR="76200" marT="76200" marB="57150">
+                    <a:solidFill>
+                      <a:srgbClr val="FAF9F6"/>
+                    </a:solidFill>
+                  </a:tcPr>
+                </a:tc>
+              </a:tr>
+              <a:tr h="476250">
+                <a:tc>
+                  <a:txBody>
+                    <a:bodyPr/>
+                    <a:lstStyle/>
+                    <a:p>
+                      <a:r>
+                        <a:rPr sz="1725">
+                          <a:solidFill>
+                            <a:srgbClr val="15191F"/>
+                          </a:solidFill>
+                          <a:latin typeface="Arial"/>
+                          <a:ea typeface="Arial"/>
+                          <a:cs typeface="Arial"/>
+                        </a:rPr>
+                        <a:t>Сезонная поправка</a:t>
+                      </a:r>
+                    </a:p>
+                  </a:txBody>
+                  <a:tcPr marL="95250" marR="76200" marT="76200" marB="57150">
+                    <a:solidFill>
+                      <a:srgbClr val="FAF9F6"/>
+                    </a:solidFill>
+                  </a:tcPr>
+                </a:tc>
+                <a:tc>
+                  <a:txBody>
+                    <a:bodyPr/>
+                    <a:lstStyle/>
+                    <a:p>
+                      <a:r>
+                        <a:rPr sz="1725">
+                          <a:solidFill>
+                            <a:srgbClr val="15191F"/>
+                          </a:solidFill>
+                          <a:latin typeface="Arial"/>
+                          <a:ea typeface="Arial"/>
+                          <a:cs typeface="Arial"/>
+                        </a:rPr>
+                        <a:t>33.1</a:t>
+                      </a:r>
+                    </a:p>
+                  </a:txBody>
+                  <a:tcPr marL="95250" marR="76200" marT="76200" marB="57150">
+                    <a:solidFill>
+                      <a:srgbClr val="FAF9F6"/>
+                    </a:solidFill>
+                  </a:tcPr>
+                </a:tc>
+              </a:tr>
+              <a:tr h="476250">
+                <a:tc>
+                  <a:txBody>
+                    <a:bodyPr/>
+                    <a:lstStyle/>
+                    <a:p>
+                      <a:r>
+                        <a:rPr sz="1725">
+                          <a:solidFill>
+                            <a:srgbClr val="15191F"/>
+                          </a:solidFill>
+                          <a:latin typeface="Arial"/>
+                          <a:ea typeface="Arial"/>
+                          <a:cs typeface="Arial"/>
+                        </a:rPr>
+                        <a:t>Месяц</a:t>
+                      </a:r>
+                    </a:p>
+                  </a:txBody>
+                  <a:tcPr marL="95250" marR="76200" marT="76200" marB="57150">
+                    <a:solidFill>
+                      <a:srgbClr val="FAF9F6"/>
+                    </a:solidFill>
+                  </a:tcPr>
+                </a:tc>
+                <a:tc>
+                  <a:txBody>
+                    <a:bodyPr/>
+                    <a:lstStyle/>
+                    <a:p>
+                      <a:r>
+                        <a:rPr sz="1725">
+                          <a:solidFill>
+                            <a:srgbClr val="15191F"/>
+                          </a:solidFill>
+                          <a:latin typeface="Arial"/>
+                          <a:ea typeface="Arial"/>
+                          <a:cs typeface="Arial"/>
+                        </a:rPr>
+                        <a:t>22.3</a:t>
+                      </a:r>
+                    </a:p>
+                  </a:txBody>
+                  <a:tcPr marL="95250" marR="76200" marT="76200" marB="57150">
+                    <a:solidFill>
+                      <a:srgbClr val="FAF9F6"/>
+                    </a:solidFill>
+                  </a:tcPr>
+                </a:tc>
+              </a:tr>
+              <a:tr h="476250">
+                <a:tc>
+                  <a:txBody>
+                    <a:bodyPr/>
+                    <a:lstStyle/>
+                    <a:p>
+                      <a:r>
+                        <a:rPr sz="1725">
+                          <a:solidFill>
+                            <a:srgbClr val="15191F"/>
+                          </a:solidFill>
+                          <a:latin typeface="Arial"/>
+                          <a:ea typeface="Arial"/>
+                          <a:cs typeface="Arial"/>
+                        </a:rPr>
+                        <a:t>Соперник</a:t>
+                      </a:r>
+                    </a:p>
+                  </a:txBody>
+                  <a:tcPr marL="95250" marR="76200" marT="76200" marB="57150">
+                    <a:solidFill>
+                      <a:srgbClr val="FAF9F6"/>
+                    </a:solidFill>
+                  </a:tcPr>
+                </a:tc>
+                <a:tc>
+                  <a:txBody>
+                    <a:bodyPr/>
+                    <a:lstStyle/>
+                    <a:p>
+                      <a:r>
+                        <a:rPr sz="1725">
+                          <a:solidFill>
+                            <a:srgbClr val="15191F"/>
+                          </a:solidFill>
+                          <a:latin typeface="Arial"/>
+                          <a:ea typeface="Arial"/>
+                          <a:cs typeface="Arial"/>
+                        </a:rPr>
+                        <a:t>19.5</a:t>
+                      </a:r>
+                    </a:p>
+                  </a:txBody>
+                  <a:tcPr marL="95250" marR="76200" marT="76200" marB="57150">
+                    <a:solidFill>
+                      <a:srgbClr val="FAF9F6"/>
+                    </a:solidFill>
+                  </a:tcPr>
+                </a:tc>
+              </a:tr>
+              <a:tr h="476250">
+                <a:tc>
+                  <a:txBody>
+                    <a:bodyPr/>
+                    <a:lstStyle/>
+                    <a:p>
+                      <a:r>
+                        <a:rPr sz="1725">
+                          <a:solidFill>
+                            <a:srgbClr val="15191F"/>
+                          </a:solidFill>
+                          <a:latin typeface="Arial"/>
+                          <a:ea typeface="Arial"/>
+                          <a:cs typeface="Arial"/>
+                        </a:rPr>
+                        <a:t>Номер матча в сезоне</a:t>
+                      </a:r>
+                    </a:p>
+                  </a:txBody>
+                  <a:tcPr marL="95250" marR="76200" marT="76200" marB="57150">
+                    <a:solidFill>
+                      <a:srgbClr val="FAF9F6"/>
+                    </a:solidFill>
+                  </a:tcPr>
+                </a:tc>
+                <a:tc>
+                  <a:txBody>
+                    <a:bodyPr/>
+                    <a:lstStyle/>
+                    <a:p>
+                      <a:r>
+                        <a:rPr sz="1725">
+                          <a:solidFill>
+                            <a:srgbClr val="15191F"/>
+                          </a:solidFill>
+                          <a:latin typeface="Arial"/>
+                          <a:ea typeface="Arial"/>
+                          <a:cs typeface="Arial"/>
+                        </a:rPr>
+                        <a:t>16.2</a:t>
+                      </a:r>
+                    </a:p>
+                  </a:txBody>
+                  <a:tcPr marL="95250" marR="76200" marT="76200" marB="57150">
+                    <a:solidFill>
+                      <a:srgbClr val="FAF9F6"/>
+                    </a:solidFill>
+                  </a:tcPr>
+                </a:tc>
+              </a:tr>
+              <a:tr h="476250">
+                <a:tc>
+                  <a:txBody>
+                    <a:bodyPr/>
+                    <a:lstStyle/>
+                    <a:p>
+                      <a:r>
+                        <a:rPr sz="1725">
+                          <a:solidFill>
+                            <a:srgbClr val="15191F"/>
+                          </a:solidFill>
+                          <a:latin typeface="Arial"/>
+                          <a:ea typeface="Arial"/>
+                          <a:cs typeface="Arial"/>
+                        </a:rPr>
+                        <a:t>День недели</a:t>
+                      </a:r>
+                    </a:p>
+                  </a:txBody>
+                  <a:tcPr marL="95250" marR="76200" marT="76200" marB="57150">
+                    <a:solidFill>
+                      <a:srgbClr val="FAF9F6"/>
+                    </a:solidFill>
+                  </a:tcPr>
+                </a:tc>
+                <a:tc>
+                  <a:txBody>
+                    <a:bodyPr/>
+                    <a:lstStyle/>
+                    <a:p>
+                      <a:r>
+                        <a:rPr sz="1725">
+                          <a:solidFill>
+                            <a:srgbClr val="15191F"/>
+                          </a:solidFill>
+                          <a:latin typeface="Arial"/>
+                          <a:ea typeface="Arial"/>
+                          <a:cs typeface="Arial"/>
+                        </a:rPr>
+                        <a:t>15.6</a:t>
+                      </a:r>
+                    </a:p>
+                  </a:txBody>
+                  <a:tcPr marL="95250" marR="76200" marT="76200" marB="57150">
+                    <a:solidFill>
+                      <a:srgbClr val="FAF9F6"/>
+                    </a:solidFill>
+                  </a:tcPr>
+                </a:tc>
+              </a:tr>
+              <a:tr h="476250">
+                <a:tc>
+                  <a:txBody>
+                    <a:bodyPr/>
+                    <a:lstStyle/>
+                    <a:p>
+                      <a:r>
+                        <a:rPr sz="1725">
+                          <a:solidFill>
+                            <a:srgbClr val="15191F"/>
+                          </a:solidFill>
+                          <a:latin typeface="Arial"/>
+                          <a:ea typeface="Arial"/>
+                          <a:cs typeface="Arial"/>
+                        </a:rPr>
+                        <a:t>Время начала</a:t>
+                      </a:r>
+                    </a:p>
+                  </a:txBody>
+                  <a:tcPr marL="95250" marR="76200" marT="76200" marB="57150">
+                    <a:solidFill>
+                      <a:srgbClr val="FAF9F6"/>
+                    </a:solidFill>
+                  </a:tcPr>
+                </a:tc>
+                <a:tc>
+                  <a:txBody>
+                    <a:bodyPr/>
+                    <a:lstStyle/>
+                    <a:p>
+                      <a:r>
+                        <a:rPr sz="1725">
+                          <a:solidFill>
+                            <a:srgbClr val="15191F"/>
+                          </a:solidFill>
+                          <a:latin typeface="Arial"/>
+                          <a:ea typeface="Arial"/>
+                          <a:cs typeface="Arial"/>
+                        </a:rPr>
+                        <a:t>2.9</a:t>
+                      </a:r>
+                    </a:p>
+                  </a:txBody>
+                  <a:tcPr marL="95250" marR="76200" marT="76200" marB="57150">
+                    <a:solidFill>
+                      <a:srgbClr val="FAF9F6"/>
+                    </a:solidFill>
+                  </a:tcPr>
+                </a:tc>
+              </a:tr>
+            </a:tbl>
+          </a:graphicData>
+        </a:graphic>
+      </p:graphicFrame>
       <p:sp>
         <p:nvSpPr>
-          <p:cNvPr id="4" name="Уровень зоны и сезона">
+          <p:cNvPr id="5" name="План продаж по зонам&#10;и сезону задаёт основу">
             <a:extLst xmlns:a="http://schemas.openxmlformats.org/drawingml/2006/main">
               <a:ext uri="{FF2B5EF4-FFF2-40B4-BE49-F238E27FC236}">
-                <a16:creationId xmlns:a16="http://schemas.microsoft.com/office/drawing/2014/main" id="{78ACA273-C2F6-4F18-B0C0-23C692E8F308}"/>
+                <a16:creationId xmlns:a16="http://schemas.microsoft.com/office/drawing/2014/main" id="{198B9F6E-0C5B-4393-929E-82A715E768E1}"/>
               </a:ext>
             </a:extLst>
           </p:cNvPr>
@@ -5107,8 +5580,8 @@
         </p:nvSpPr>
         <p:spPr>
           <a:xfrm xmlns:a="http://schemas.openxmlformats.org/drawingml/2006/main">
-            <a:off x="523875" y="1466850"/>
-            <a:ext cx="10477500" cy="457200"/>
+            <a:off x="7191375" y="1543050"/>
+            <a:ext cx="4476750" cy="1009650"/>
           </a:xfrm>
           <a:prstGeom xmlns:a="http://schemas.openxmlformats.org/drawingml/2006/main" prst="rect">
             <a:avLst/>
@@ -5154,17 +5627,40 @@
                 <a:ea typeface="Arial"/>
                 <a:cs typeface="Arial"/>
               </a:rPr>
-              <a:t>Уровень зоны и сезона</a:t>
+              <a:t>План продаж по зонам</a:t>
+            </a:r>
+          </a:p>
+          <a:p xmlns:a="http://schemas.openxmlformats.org/drawingml/2006/main">
+            <a:pPr>
+              <a:defRPr sz="2550" b="1">
+                <a:solidFill>
+                  <a:srgbClr val="B62730"/>
+                </a:solidFill>
+                <a:latin typeface="Arial"/>
+                <a:ea typeface="Arial"/>
+                <a:cs typeface="Arial"/>
+              </a:defRPr>
+            </a:pPr>
+            <a:r>
+              <a:rPr sz="2550" b="1">
+                <a:solidFill>
+                  <a:srgbClr val="B62730"/>
+                </a:solidFill>
+                <a:latin typeface="Arial"/>
+                <a:ea typeface="Arial"/>
+                <a:cs typeface="Arial"/>
+              </a:rPr>
+              <a:t>и сезону задаёт основу</a:t>
             </a:r>
           </a:p>
         </p:txBody>
       </p:sp>
       <p:sp>
         <p:nvSpPr>
-          <p:cNvPr id="5" name="Сглаженное среднее: при малой истории опираем">
+          <p:cNvPr id="6" name="Соперник и день недели&#10;уточняют прогноз&#10;умере">
             <a:extLst xmlns:a="http://schemas.openxmlformats.org/drawingml/2006/main">
               <a:ext uri="{FF2B5EF4-FFF2-40B4-BE49-F238E27FC236}">
-                <a16:creationId xmlns:a16="http://schemas.microsoft.com/office/drawing/2014/main" id="{8FF38D3D-9C89-43D8-A384-A4D1C5BBF0EA}"/>
+                <a16:creationId xmlns:a16="http://schemas.microsoft.com/office/drawing/2014/main" id="{5561A95D-47E6-4246-AB18-1450E1FF2ACF}"/>
               </a:ext>
             </a:extLst>
           </p:cNvPr>
@@ -5175,8 +5671,8 @@
         </p:nvSpPr>
         <p:spPr>
           <a:xfrm xmlns:a="http://schemas.openxmlformats.org/drawingml/2006/main">
-            <a:off x="523875" y="1971675"/>
-            <a:ext cx="11049000" cy="619125"/>
+            <a:off x="7191375" y="2924175"/>
+            <a:ext cx="4476750" cy="1333500"/>
           </a:xfrm>
           <a:prstGeom xmlns:a="http://schemas.openxmlformats.org/drawingml/2006/main" prst="rect">
             <a:avLst/>
@@ -5192,7 +5688,7 @@
           </a:bodyPr>
           <a:lstStyle xmlns:a="http://schemas.openxmlformats.org/drawingml/2006/main">
             <a:defPPr>
-              <a:defRPr sz="2025" b="0">
+              <a:defRPr sz="2175" b="0">
                 <a:solidFill>
                   <a:srgbClr val="15191F"/>
                 </a:solidFill>
@@ -5204,7 +5700,7 @@
           </a:lstStyle>
           <a:p xmlns:a="http://schemas.openxmlformats.org/drawingml/2006/main">
             <a:pPr>
-              <a:defRPr sz="2025" b="0">
+              <a:defRPr sz="2175" b="0">
                 <a:solidFill>
                   <a:srgbClr val="15191F"/>
                 </a:solidFill>
@@ -5214,7 +5710,7 @@
               </a:defRPr>
             </a:pPr>
             <a:r>
-              <a:rPr sz="2025" b="0">
+              <a:rPr sz="2175" b="0">
                 <a:solidFill>
                   <a:srgbClr val="15191F"/>
                 </a:solidFill>
@@ -5222,17 +5718,63 @@
                 <a:ea typeface="Arial"/>
                 <a:cs typeface="Arial"/>
               </a:rPr>
-              <a:t>Сглаженное среднее: при малой истории опираемся на прошлые сезоны</a:t>
+              <a:t>Соперник и день недели</a:t>
+            </a:r>
+          </a:p>
+          <a:p xmlns:a="http://schemas.openxmlformats.org/drawingml/2006/main">
+            <a:pPr>
+              <a:defRPr sz="2175" b="0">
+                <a:solidFill>
+                  <a:srgbClr val="15191F"/>
+                </a:solidFill>
+                <a:latin typeface="Arial"/>
+                <a:ea typeface="Arial"/>
+                <a:cs typeface="Arial"/>
+              </a:defRPr>
+            </a:pPr>
+            <a:r>
+              <a:rPr sz="2175" b="0">
+                <a:solidFill>
+                  <a:srgbClr val="15191F"/>
+                </a:solidFill>
+                <a:latin typeface="Arial"/>
+                <a:ea typeface="Arial"/>
+                <a:cs typeface="Arial"/>
+              </a:rPr>
+              <a:t>уточняют прогноз</a:t>
+            </a:r>
+          </a:p>
+          <a:p xmlns:a="http://schemas.openxmlformats.org/drawingml/2006/main">
+            <a:pPr>
+              <a:defRPr sz="2175" b="0">
+                <a:solidFill>
+                  <a:srgbClr val="15191F"/>
+                </a:solidFill>
+                <a:latin typeface="Arial"/>
+                <a:ea typeface="Arial"/>
+                <a:cs typeface="Arial"/>
+              </a:defRPr>
+            </a:pPr>
+            <a:r>
+              <a:rPr sz="2175" b="0">
+                <a:solidFill>
+                  <a:srgbClr val="15191F"/>
+                </a:solidFill>
+                <a:latin typeface="Arial"/>
+                <a:ea typeface="Arial"/>
+                <a:cs typeface="Arial"/>
+              </a:rPr>
+              <a:t>умеренными поправками</a:t>
             </a:r>
           </a:p>
         </p:txBody>
       </p:sp>
       <p:sp>
         <p:nvSpPr>
-          <p:cNvPr id="6" name="+ линейная поправка Ridge">
+          <p:cNvPr id="7" name="Объём зон различается.&#10;Это не рейтинг популяр">
             <a:extLst xmlns:a="http://schemas.openxmlformats.org/drawingml/2006/main">
               <a:ext uri="{FF2B5EF4-FFF2-40B4-BE49-F238E27FC236}">
-                <a16:creationId xmlns:a16="http://schemas.microsoft.com/office/drawing/2014/main" id="{5A498044-9B5E-4871-A108-24D2A457B0A0}"/>
+                <a16:creationId xmlns:a16="http://schemas.microsoft.com/office/drawing/2014/main" id="{AFA14966-5E4B-4BC7-B9C9-719A4533FC07}"/>
               </a:ext>
             </a:extLst>
           </p:cNvPr>
@@ -5243,8 +5785,8 @@
         </p:nvSpPr>
         <p:spPr>
           <a:xfrm xmlns:a="http://schemas.openxmlformats.org/drawingml/2006/main">
-            <a:off x="523875" y="2752725"/>
-            <a:ext cx="10477500" cy="457200"/>
+            <a:off x="7191375" y="4638675"/>
+            <a:ext cx="4476750" cy="1047750"/>
           </a:xfrm>
           <a:prstGeom xmlns:a="http://schemas.openxmlformats.org/drawingml/2006/main" prst="rect">
             <a:avLst/>
@@ -5260,9 +5802,9 @@
           </a:bodyPr>
           <a:lstStyle xmlns:a="http://schemas.openxmlformats.org/drawingml/2006/main">
             <a:defPPr>
-              <a:defRPr sz="2550" b="1">
-                <a:solidFill>
-                  <a:srgbClr val="B62730"/>
+              <a:defRPr sz="1800" b="0">
+                <a:solidFill>
+                  <a:srgbClr val="505C68"/>
                 </a:solidFill>
                 <a:latin typeface="Arial"/>
                 <a:ea typeface="Arial"/>
@@ -5272,9 +5814,9 @@
           </a:lstStyle>
           <a:p xmlns:a="http://schemas.openxmlformats.org/drawingml/2006/main">
             <a:pPr>
-              <a:defRPr sz="2550" b="1">
-                <a:solidFill>
-                  <a:srgbClr val="B62730"/>
+              <a:defRPr sz="1800" b="0">
+                <a:solidFill>
+                  <a:srgbClr val="505C68"/>
                 </a:solidFill>
                 <a:latin typeface="Arial"/>
                 <a:ea typeface="Arial"/>
@@ -5282,25 +5824,71 @@
               </a:defRPr>
             </a:pPr>
             <a:r>
-              <a:rPr sz="2550" b="1">
-                <a:solidFill>
-                  <a:srgbClr val="B62730"/>
+              <a:rPr sz="1800" b="0">
+                <a:solidFill>
+                  <a:srgbClr val="505C68"/>
                 </a:solidFill>
                 <a:latin typeface="Arial"/>
                 <a:ea typeface="Arial"/>
                 <a:cs typeface="Arial"/>
               </a:rPr>
-              <a:t>+ линейная поправка Ridge</a:t>
+              <a:t>Объём зон различается.</a:t>
+            </a:r>
+          </a:p>
+          <a:p xmlns:a="http://schemas.openxmlformats.org/drawingml/2006/main">
+            <a:pPr>
+              <a:defRPr sz="1800" b="0">
+                <a:solidFill>
+                  <a:srgbClr val="505C68"/>
+                </a:solidFill>
+                <a:latin typeface="Arial"/>
+                <a:ea typeface="Arial"/>
+                <a:cs typeface="Arial"/>
+              </a:defRPr>
+            </a:pPr>
+            <a:r>
+              <a:rPr sz="1800" b="0">
+                <a:solidFill>
+                  <a:srgbClr val="505C68"/>
+                </a:solidFill>
+                <a:latin typeface="Arial"/>
+                <a:ea typeface="Arial"/>
+                <a:cs typeface="Arial"/>
+              </a:rPr>
+              <a:t>Это не рейтинг популярности</a:t>
+            </a:r>
+          </a:p>
+          <a:p xmlns:a="http://schemas.openxmlformats.org/drawingml/2006/main">
+            <a:pPr>
+              <a:defRPr sz="1800" b="0">
+                <a:solidFill>
+                  <a:srgbClr val="505C68"/>
+                </a:solidFill>
+                <a:latin typeface="Arial"/>
+                <a:ea typeface="Arial"/>
+                <a:cs typeface="Arial"/>
+              </a:defRPr>
+            </a:pPr>
+            <a:r>
+              <a:rPr sz="1800" b="0">
+                <a:solidFill>
+                  <a:srgbClr val="505C68"/>
+                </a:solidFill>
+                <a:latin typeface="Arial"/>
+                <a:ea typeface="Arial"/>
+                <a:cs typeface="Arial"/>
+              </a:rPr>
+              <a:t>и не эффект рекламы</a:t>
             </a:r>
           </a:p>
         </p:txBody>
       </p:sp>
       <p:sp>
         <p:nvSpPr>
-          <p:cNvPr id="7" name="Зона, соперник, день недели, месяц, время нач">
+          <p:cNvPr id="8" name="Средний абсолютный вклад частей фиксированной">
             <a:extLst xmlns:a="http://schemas.openxmlformats.org/drawingml/2006/main">
               <a:ext uri="{FF2B5EF4-FFF2-40B4-BE49-F238E27FC236}">
-                <a16:creationId xmlns:a16="http://schemas.microsoft.com/office/drawing/2014/main" id="{F1BA093B-94C9-4515-8A80-30751DC37102}"/>
+                <a16:creationId xmlns:a16="http://schemas.microsoft.com/office/drawing/2014/main" id="{818F5690-8A4F-468A-A08C-CA0B0DBB6BBF}"/>
               </a:ext>
             </a:extLst>
           </p:cNvPr>
@@ -5311,8 +5899,8 @@
         </p:nvSpPr>
         <p:spPr>
           <a:xfrm xmlns:a="http://schemas.openxmlformats.org/drawingml/2006/main">
-            <a:off x="523875" y="3257550"/>
-            <a:ext cx="11049000" cy="781050"/>
+            <a:off x="523875" y="5924550"/>
+            <a:ext cx="11144250" cy="333375"/>
           </a:xfrm>
           <a:prstGeom xmlns:a="http://schemas.openxmlformats.org/drawingml/2006/main" prst="rect">
             <a:avLst/>
@@ -5328,9 +5916,9 @@
           </a:bodyPr>
           <a:lstStyle xmlns:a="http://schemas.openxmlformats.org/drawingml/2006/main">
             <a:defPPr>
-              <a:defRPr sz="2025" b="0">
-                <a:solidFill>
-                  <a:srgbClr val="15191F"/>
+              <a:defRPr sz="1650" b="0">
+                <a:solidFill>
+                  <a:srgbClr val="505C68"/>
                 </a:solidFill>
                 <a:latin typeface="Arial"/>
                 <a:ea typeface="Arial"/>
@@ -5340,9 +5928,9 @@
           </a:lstStyle>
           <a:p xmlns:a="http://schemas.openxmlformats.org/drawingml/2006/main">
             <a:pPr>
-              <a:defRPr sz="2025" b="0">
-                <a:solidFill>
-                  <a:srgbClr val="15191F"/>
+              <a:defRPr sz="1650" b="0">
+                <a:solidFill>
+                  <a:srgbClr val="505C68"/>
                 </a:solidFill>
                 <a:latin typeface="Arial"/>
                 <a:ea typeface="Arial"/>
@@ -5350,197 +5938,15 @@
               </a:defRPr>
             </a:pPr>
             <a:r>
-              <a:rPr sz="2025" b="0">
-                <a:solidFill>
-                  <a:srgbClr val="15191F"/>
+              <a:rPr sz="1650" b="0">
+                <a:solidFill>
+                  <a:srgbClr val="505C68"/>
                 </a:solidFill>
                 <a:latin typeface="Arial"/>
                 <a:ea typeface="Arial"/>
                 <a:cs typeface="Arial"/>
               </a:rPr>
-              <a:t>Зона, соперник, день недели, месяц, время начала, номер матча</a:t>
-            </a:r>
-          </a:p>
-          <a:p xmlns:a="http://schemas.openxmlformats.org/drawingml/2006/main">
-            <a:pPr>
-              <a:defRPr sz="2025" b="0">
-                <a:solidFill>
-                  <a:srgbClr val="15191F"/>
-                </a:solidFill>
-                <a:latin typeface="Arial"/>
-                <a:ea typeface="Arial"/>
-                <a:cs typeface="Arial"/>
-              </a:defRPr>
-            </a:pPr>
-            <a:r>
-              <a:rPr sz="2025" b="0">
-                <a:solidFill>
-                  <a:srgbClr val="15191F"/>
-                </a:solidFill>
-                <a:latin typeface="Arial"/>
-                <a:ea typeface="Arial"/>
-                <a:cs typeface="Arial"/>
-              </a:rPr>
-              <a:t>Штраф alpha = 10 ограничивает чрезмерные поправки</a:t>
-            </a:r>
-          </a:p>
-        </p:txBody>
-      </p:sp>
-      <p:sp>
-        <p:nvSpPr>
-          <p:cNvPr id="8" name="+ 0.5 × поправка ранних продаж, когда они изв">
-            <a:extLst xmlns:a="http://schemas.openxmlformats.org/drawingml/2006/main">
-              <a:ext uri="{FF2B5EF4-FFF2-40B4-BE49-F238E27FC236}">
-                <a16:creationId xmlns:a16="http://schemas.microsoft.com/office/drawing/2014/main" id="{D75C35A3-EA45-4FE6-A376-D84EBD787387}"/>
-              </a:ext>
-            </a:extLst>
-          </p:cNvPr>
-          <p:cNvSpPr>
-            <a:spLocks xmlns:a="http://schemas.openxmlformats.org/drawingml/2006/main" noGrp="1"/>
-          </p:cNvSpPr>
-          <p:nvPr/>
-        </p:nvSpPr>
-        <p:spPr>
-          <a:xfrm xmlns:a="http://schemas.openxmlformats.org/drawingml/2006/main">
-            <a:off x="523875" y="4381500"/>
-            <a:ext cx="11049000" cy="457200"/>
-          </a:xfrm>
-          <a:prstGeom xmlns:a="http://schemas.openxmlformats.org/drawingml/2006/main" prst="rect">
-            <a:avLst/>
-          </a:prstGeom>
-          <a:noFill xmlns:a="http://schemas.openxmlformats.org/drawingml/2006/main"/>
-          <a:ln xmlns:a="http://schemas.openxmlformats.org/drawingml/2006/main" w="0">
-            <a:noFill/>
-          </a:ln>
-        </p:spPr>
-        <p:txBody>
-          <a:bodyPr xmlns:a="http://schemas.openxmlformats.org/drawingml/2006/main" lIns="0" tIns="0" rIns="0" bIns="0">
-            <a:noAutofit/>
-          </a:bodyPr>
-          <a:lstStyle xmlns:a="http://schemas.openxmlformats.org/drawingml/2006/main">
-            <a:defPPr>
-              <a:defRPr sz="2400" b="1">
-                <a:solidFill>
-                  <a:srgbClr val="B62730"/>
-                </a:solidFill>
-                <a:latin typeface="Arial"/>
-                <a:ea typeface="Arial"/>
-                <a:cs typeface="Arial"/>
-              </a:defRPr>
-            </a:defPPr>
-          </a:lstStyle>
-          <a:p xmlns:a="http://schemas.openxmlformats.org/drawingml/2006/main">
-            <a:pPr>
-              <a:defRPr sz="2400" b="1">
-                <a:solidFill>
-                  <a:srgbClr val="B62730"/>
-                </a:solidFill>
-                <a:latin typeface="Arial"/>
-                <a:ea typeface="Arial"/>
-                <a:cs typeface="Arial"/>
-              </a:defRPr>
-            </a:pPr>
-            <a:r>
-              <a:rPr sz="2400" b="1">
-                <a:solidFill>
-                  <a:srgbClr val="B62730"/>
-                </a:solidFill>
-                <a:latin typeface="Arial"/>
-                <a:ea typeface="Arial"/>
-                <a:cs typeface="Arial"/>
-              </a:rPr>
-              <a:t>+ 0.5 × поправка ранних продаж, когда они известны</a:t>
-            </a:r>
-          </a:p>
-        </p:txBody>
-      </p:sp>
-      <p:sp>
-        <p:nvSpPr>
-          <p:cNvPr id="9" name="Аналоги на том же числе дней до игры; минимум">
-            <a:extLst xmlns:a="http://schemas.openxmlformats.org/drawingml/2006/main">
-              <a:ext uri="{FF2B5EF4-FFF2-40B4-BE49-F238E27FC236}">
-                <a16:creationId xmlns:a16="http://schemas.microsoft.com/office/drawing/2014/main" id="{4BA1197D-9F44-4296-AFFF-A52913429470}"/>
-              </a:ext>
-            </a:extLst>
-          </p:cNvPr>
-          <p:cNvSpPr>
-            <a:spLocks xmlns:a="http://schemas.openxmlformats.org/drawingml/2006/main" noGrp="1"/>
-          </p:cNvSpPr>
-          <p:nvPr/>
-        </p:nvSpPr>
-        <p:spPr>
-          <a:xfrm xmlns:a="http://schemas.openxmlformats.org/drawingml/2006/main">
-            <a:off x="523875" y="4972050"/>
-            <a:ext cx="11049000" cy="1028700"/>
-          </a:xfrm>
-          <a:prstGeom xmlns:a="http://schemas.openxmlformats.org/drawingml/2006/main" prst="rect">
-            <a:avLst/>
-          </a:prstGeom>
-          <a:noFill xmlns:a="http://schemas.openxmlformats.org/drawingml/2006/main"/>
-          <a:ln xmlns:a="http://schemas.openxmlformats.org/drawingml/2006/main" w="0">
-            <a:noFill/>
-          </a:ln>
-        </p:spPr>
-        <p:txBody>
-          <a:bodyPr xmlns:a="http://schemas.openxmlformats.org/drawingml/2006/main" lIns="0" tIns="0" rIns="0" bIns="0">
-            <a:noAutofit/>
-          </a:bodyPr>
-          <a:lstStyle xmlns:a="http://schemas.openxmlformats.org/drawingml/2006/main">
-            <a:defPPr>
-              <a:defRPr sz="1950" b="0">
-                <a:solidFill>
-                  <a:srgbClr val="15191F"/>
-                </a:solidFill>
-                <a:latin typeface="Arial"/>
-                <a:ea typeface="Arial"/>
-                <a:cs typeface="Arial"/>
-              </a:defRPr>
-            </a:defPPr>
-          </a:lstStyle>
-          <a:p xmlns:a="http://schemas.openxmlformats.org/drawingml/2006/main">
-            <a:pPr>
-              <a:defRPr sz="1950" b="0">
-                <a:solidFill>
-                  <a:srgbClr val="15191F"/>
-                </a:solidFill>
-                <a:latin typeface="Arial"/>
-                <a:ea typeface="Arial"/>
-                <a:cs typeface="Arial"/>
-              </a:defRPr>
-            </a:pPr>
-            <a:r>
-              <a:rPr sz="1950" b="0">
-                <a:solidFill>
-                  <a:srgbClr val="15191F"/>
-                </a:solidFill>
-                <a:latin typeface="Arial"/>
-                <a:ea typeface="Arial"/>
-                <a:cs typeface="Arial"/>
-              </a:rPr>
-              <a:t>Аналоги на том же числе дней до игры; минимум 5 завершённых матчей</a:t>
-            </a:r>
-          </a:p>
-          <a:p xmlns:a="http://schemas.openxmlformats.org/drawingml/2006/main">
-            <a:pPr>
-              <a:defRPr sz="1950" b="0">
-                <a:solidFill>
-                  <a:srgbClr val="15191F"/>
-                </a:solidFill>
-                <a:latin typeface="Arial"/>
-                <a:ea typeface="Arial"/>
-                <a:cs typeface="Arial"/>
-              </a:defRPr>
-            </a:pPr>
-            <a:r>
-              <a:rPr sz="1950" b="0">
-                <a:solidFill>
-                  <a:srgbClr val="15191F"/>
-                </a:solidFill>
-                <a:latin typeface="Arial"/>
-                <a:ea typeface="Arial"/>
-                <a:cs typeface="Arial"/>
-              </a:rPr>
-              <a:t>Итог: округление, нижняя граница уже проданного, верхняя seats − season_tickets</a:t>
+              <a:t>Средний абсолютный вклад частей фиксированной модели на 85 матчах, до своих продаж</a:t>
             </a:r>
           </a:p>
         </p:txBody>
@@ -5548,7 +5954,7 @@
     </p:spTree>
     <p:extLst>
       <p:ext uri="{BB962C8B-B14F-4D97-AF65-F5344CB8AC3E}">
-        <p14:creationId xmlns:p14="http://schemas.microsoft.com/office/powerpoint/2010/main" val="1667084285"/>
+        <p14:creationId xmlns:p14="http://schemas.microsoft.com/office/powerpoint/2010/main" val="272980245"/>
       </p:ext>
     </p:extLst>
   </p:cSld>
@@ -5576,10 +5982,10 @@
       </p:grpSpPr>
       <p:sp>
         <p:nvSpPr>
-          <p:cNvPr id="8" name="Проверка по времени">
+          <p:cNvPr id="9" name="Как читать оценку качества">
             <a:extLst xmlns:a="http://schemas.openxmlformats.org/drawingml/2006/main">
               <a:ext uri="{FF2B5EF4-FFF2-40B4-BE49-F238E27FC236}">
-                <a16:creationId xmlns:a16="http://schemas.microsoft.com/office/drawing/2014/main" id="{54A2F567-98EA-4B07-A39F-8AF7A2530884}"/>
+                <a16:creationId xmlns:a16="http://schemas.microsoft.com/office/drawing/2014/main" id="{D86359C2-C0C3-4EB4-B39F-BF956BCA3D18}"/>
               </a:ext>
             </a:extLst>
           </p:cNvPr>
@@ -5637,7 +6043,7 @@
                 <a:ea typeface="Arial"/>
                 <a:cs typeface="Arial"/>
               </a:rPr>
-              <a:t>Проверка по времени</a:t>
+              <a:t>Как читать оценку качества</a:t>
             </a:r>
           </a:p>
         </p:txBody>
@@ -5647,7 +6053,7 @@
           <p:cNvPr id="2" name="СпускоГрад  /  DATA MATCH">
             <a:extLst xmlns:a="http://schemas.openxmlformats.org/drawingml/2006/main">
               <a:ext uri="{FF2B5EF4-FFF2-40B4-BE49-F238E27FC236}">
-                <a16:creationId xmlns:a16="http://schemas.microsoft.com/office/drawing/2014/main" id="{B320D28B-0B7E-41EA-9CC1-383FF81E3986}"/>
+                <a16:creationId xmlns:a16="http://schemas.microsoft.com/office/drawing/2014/main" id="{783539A6-BA92-4065-8396-4FEEDCD40A9C}"/>
               </a:ext>
             </a:extLst>
           </p:cNvPr>
@@ -5715,7 +6121,7 @@
           <p:cNvPr id="3" name="04">
             <a:extLst xmlns:a="http://schemas.openxmlformats.org/drawingml/2006/main">
               <a:ext uri="{FF2B5EF4-FFF2-40B4-BE49-F238E27FC236}">
-                <a16:creationId xmlns:a16="http://schemas.microsoft.com/office/drawing/2014/main" id="{F479EF15-692C-4E1A-BA8C-715F6666E22B}"/>
+                <a16:creationId xmlns:a16="http://schemas.microsoft.com/office/drawing/2014/main" id="{FF632A44-86E2-4B05-B52E-31C3BDD2EBB2}"/>
               </a:ext>
             </a:extLst>
           </p:cNvPr>
@@ -5783,7 +6189,7 @@
           <p:cNvPr id="4" name="">
             <a:extLst xmlns:a="http://schemas.openxmlformats.org/drawingml/2006/main">
               <a:ext uri="{FF2B5EF4-FFF2-40B4-BE49-F238E27FC236}">
-                <a16:creationId xmlns:a16="http://schemas.microsoft.com/office/drawing/2014/main" id="{8C1856DC-34C3-4FA8-8DB5-533BE0E497BD}"/>
+                <a16:creationId xmlns:a16="http://schemas.microsoft.com/office/drawing/2014/main" id="{A3C9C147-1517-4BD2-9AB0-61B8CECD98BE}"/>
               </a:ext>
             </a:extLst>
           </p:cNvPr>
@@ -5791,26 +6197,25 @@
           <p:nvPr/>
         </p:nvGraphicFramePr>
         <p:xfrm>
-          <a:off xmlns:a="http://schemas.openxmlformats.org/drawingml/2006/main" x="523875" y="1343025"/>
-          <a:ext xmlns:a="http://schemas.openxmlformats.org/drawingml/2006/main" cx="11144250" cy="2095500"/>
+          <a:off xmlns:a="http://schemas.openxmlformats.org/drawingml/2006/main" x="523875" y="1400175"/>
+          <a:ext xmlns:a="http://schemas.openxmlformats.org/drawingml/2006/main" cx="11144250" cy="2476500"/>
         </p:xfrm>
         <a:graphic xmlns:a="http://schemas.openxmlformats.org/drawingml/2006/main">
           <a:graphicData uri="http://schemas.openxmlformats.org/drawingml/2006/table">
             <a:tbl>
               <a:tblPr/>
               <a:tblGrid>
-                <a:gridCol w="3714750"/>
-                <a:gridCol w="3429000"/>
-                <a:gridCol w="4000500"/>
+                <a:gridCol w="1714500"/>
+                <a:gridCol w="9429750"/>
               </a:tblGrid>
-              <a:tr h="523875">
-                <a:tc>
-                  <a:txBody>
-                    <a:bodyPr/>
-                    <a:lstStyle/>
-                    <a:p>
-                      <a:r>
-                        <a:rPr sz="1950" b="1">
+              <a:tr h="619125">
+                <a:tc>
+                  <a:txBody>
+                    <a:bodyPr/>
+                    <a:lstStyle/>
+                    <a:p>
+                      <a:r>
+                        <a:rPr sz="1875" b="1">
                           <a:solidFill>
                             <a:srgbClr val="FFFFFF"/>
                           </a:solidFill>
@@ -5818,7 +6223,7 @@
                           <a:ea typeface="Arial"/>
                           <a:cs typeface="Arial"/>
                         </a:rPr>
-                        <a:t>Окно</a:t>
+                        <a:t>Показатель</a:t>
                       </a:r>
                     </a:p>
                   </a:txBody>
@@ -5834,7 +6239,7 @@
                     <a:lstStyle/>
                     <a:p>
                       <a:r>
-                        <a:rPr sz="1950" b="1">
+                        <a:rPr sz="1875" b="1">
                           <a:solidFill>
                             <a:srgbClr val="FFFFFF"/>
                           </a:solidFill>
@@ -5842,7 +6247,7 @@
                           <a:ea typeface="Arial"/>
                           <a:cs typeface="Arial"/>
                         </a:rPr>
-                        <a:t>Без продаж</a:t>
+                        <a:t>Простыми словами</a:t>
                       </a:r>
                     </a:p>
                   </a:txBody>
@@ -5852,95 +6257,47 @@
                     </a:solidFill>
                   </a:tcPr>
                 </a:tc>
-                <a:tc>
-                  <a:txBody>
-                    <a:bodyPr/>
-                    <a:lstStyle/>
-                    <a:p>
-                      <a:r>
-                        <a:rPr sz="1950" b="1">
-                          <a:solidFill>
-                            <a:srgbClr val="FFFFFF"/>
-                          </a:solidFill>
-                          <a:latin typeface="Arial"/>
-                          <a:ea typeface="Arial"/>
-                          <a:cs typeface="Arial"/>
-                        </a:rPr>
-                        <a:t>С продажами, L ≥ 28</a:t>
-                      </a:r>
-                    </a:p>
-                  </a:txBody>
-                  <a:tcPr marL="95250" marR="76200" marT="76200" marB="57150">
-                    <a:solidFill>
-                      <a:srgbClr val="15191F"/>
-                    </a:solidFill>
-                  </a:tcPr>
-                </a:tc>
               </a:tr>
-              <a:tr h="523875">
-                <a:tc>
-                  <a:txBody>
-                    <a:bodyPr/>
-                    <a:lstStyle/>
-                    <a:p>
-                      <a:r>
-                        <a:rPr sz="1950">
-                          <a:solidFill>
-                            <a:srgbClr val="15191F"/>
-                          </a:solidFill>
-                          <a:latin typeface="Arial"/>
-                          <a:ea typeface="Arial"/>
-                          <a:cs typeface="Arial"/>
-                        </a:rPr>
-                        <a:t>M035–M051</a:t>
-                      </a:r>
-                    </a:p>
-                  </a:txBody>
-                  <a:tcPr marL="95250" marR="76200" marT="76200" marB="57150">
-                    <a:solidFill>
-                      <a:srgbClr val="FAF9F6"/>
-                    </a:solidFill>
-                  </a:tcPr>
-                </a:tc>
-                <a:tc>
-                  <a:txBody>
-                    <a:bodyPr/>
-                    <a:lstStyle/>
-                    <a:p>
-                      <a:r>
-                        <a:rPr sz="1950">
-                          <a:solidFill>
-                            <a:srgbClr val="15191F"/>
-                          </a:solidFill>
-                          <a:latin typeface="Arial"/>
-                          <a:ea typeface="Arial"/>
-                          <a:cs typeface="Arial"/>
-                        </a:rPr>
-                        <a:t>17 матчей</a:t>
-                      </a:r>
-                    </a:p>
-                  </a:txBody>
-                  <a:tcPr marL="95250" marR="76200" marT="76200" marB="57150">
-                    <a:solidFill>
-                      <a:srgbClr val="FAF9F6"/>
-                    </a:solidFill>
-                  </a:tcPr>
-                </a:tc>
-                <a:tc>
-                  <a:txBody>
-                    <a:bodyPr/>
-                    <a:lstStyle/>
-                    <a:p>
-                      <a:r>
-                        <a:rPr sz="1950">
-                          <a:solidFill>
-                            <a:srgbClr val="15191F"/>
-                          </a:solidFill>
-                          <a:latin typeface="Arial"/>
-                          <a:ea typeface="Arial"/>
-                          <a:cs typeface="Arial"/>
-                        </a:rPr>
-                        <a:t>10 матчей</a:t>
+              <a:tr h="619125">
+                <a:tc>
+                  <a:txBody>
+                    <a:bodyPr/>
+                    <a:lstStyle/>
+                    <a:p>
+                      <a:r>
+                        <a:rPr sz="1875">
+                          <a:solidFill>
+                            <a:srgbClr val="15191F"/>
+                          </a:solidFill>
+                          <a:latin typeface="Arial"/>
+                          <a:ea typeface="Arial"/>
+                          <a:cs typeface="Arial"/>
+                        </a:rPr>
+                        <a:t>RMSE</a:t>
+                      </a:r>
+                    </a:p>
+                  </a:txBody>
+                  <a:tcPr marL="95250" marR="76200" marT="76200" marB="57150">
+                    <a:solidFill>
+                      <a:srgbClr val="FAF9F6"/>
+                    </a:solidFill>
+                  </a:tcPr>
+                </a:tc>
+                <a:tc>
+                  <a:txBody>
+                    <a:bodyPr/>
+                    <a:lstStyle/>
+                    <a:p>
+                      <a:r>
+                        <a:rPr sz="1875">
+                          <a:solidFill>
+                            <a:srgbClr val="15191F"/>
+                          </a:solidFill>
+                          <a:latin typeface="Arial"/>
+                          <a:ea typeface="Arial"/>
+                          <a:cs typeface="Arial"/>
+                        </a:rPr>
+                        <a:t>Ошибка прогноза в билетах. Меньше - лучше</a:t>
                       </a:r>
                     </a:p>
                   </a:txBody>
@@ -5951,70 +6308,46 @@
                   </a:tcPr>
                 </a:tc>
               </a:tr>
-              <a:tr h="523875">
-                <a:tc>
-                  <a:txBody>
-                    <a:bodyPr/>
-                    <a:lstStyle/>
-                    <a:p>
-                      <a:r>
-                        <a:rPr sz="1950">
-                          <a:solidFill>
-                            <a:srgbClr val="15191F"/>
-                          </a:solidFill>
-                          <a:latin typeface="Arial"/>
-                          <a:ea typeface="Arial"/>
-                          <a:cs typeface="Arial"/>
-                        </a:rPr>
-                        <a:t>M052–M068</a:t>
-                      </a:r>
-                    </a:p>
-                  </a:txBody>
-                  <a:tcPr marL="95250" marR="76200" marT="76200" marB="57150">
-                    <a:solidFill>
-                      <a:srgbClr val="FAF9F6"/>
-                    </a:solidFill>
-                  </a:tcPr>
-                </a:tc>
-                <a:tc>
-                  <a:txBody>
-                    <a:bodyPr/>
-                    <a:lstStyle/>
-                    <a:p>
-                      <a:r>
-                        <a:rPr sz="1950">
-                          <a:solidFill>
-                            <a:srgbClr val="15191F"/>
-                          </a:solidFill>
-                          <a:latin typeface="Arial"/>
-                          <a:ea typeface="Arial"/>
-                          <a:cs typeface="Arial"/>
-                        </a:rPr>
-                        <a:t>17 матчей</a:t>
-                      </a:r>
-                    </a:p>
-                  </a:txBody>
-                  <a:tcPr marL="95250" marR="76200" marT="76200" marB="57150">
-                    <a:solidFill>
-                      <a:srgbClr val="FAF9F6"/>
-                    </a:solidFill>
-                  </a:tcPr>
-                </a:tc>
-                <a:tc>
-                  <a:txBody>
-                    <a:bodyPr/>
-                    <a:lstStyle/>
-                    <a:p>
-                      <a:r>
-                        <a:rPr sz="1950">
-                          <a:solidFill>
-                            <a:srgbClr val="15191F"/>
-                          </a:solidFill>
-                          <a:latin typeface="Arial"/>
-                          <a:ea typeface="Arial"/>
-                          <a:cs typeface="Arial"/>
-                        </a:rPr>
-                        <a:t>17 матчей</a:t>
+              <a:tr h="619125">
+                <a:tc>
+                  <a:txBody>
+                    <a:bodyPr/>
+                    <a:lstStyle/>
+                    <a:p>
+                      <a:r>
+                        <a:rPr sz="1875">
+                          <a:solidFill>
+                            <a:srgbClr val="15191F"/>
+                          </a:solidFill>
+                          <a:latin typeface="Arial"/>
+                          <a:ea typeface="Arial"/>
+                          <a:cs typeface="Arial"/>
+                        </a:rPr>
+                        <a:t>R</a:t>
+                      </a:r>
+                    </a:p>
+                  </a:txBody>
+                  <a:tcPr marL="95250" marR="76200" marT="76200" marB="57150">
+                    <a:solidFill>
+                      <a:srgbClr val="FAF9F6"/>
+                    </a:solidFill>
+                  </a:tcPr>
+                </a:tc>
+                <a:tc>
+                  <a:txBody>
+                    <a:bodyPr/>
+                    <a:lstStyle/>
+                    <a:p>
+                      <a:r>
+                        <a:rPr sz="1875">
+                          <a:solidFill>
+                            <a:srgbClr val="15191F"/>
+                          </a:solidFill>
+                          <a:latin typeface="Arial"/>
+                          <a:ea typeface="Arial"/>
+                          <a:cs typeface="Arial"/>
+                        </a:rPr>
+                        <a:t>Ошибка одного окна: RMSE смеси двух сценариев</a:t>
                       </a:r>
                     </a:p>
                   </a:txBody>
@@ -6025,70 +6358,46 @@
                   </a:tcPr>
                 </a:tc>
               </a:tr>
-              <a:tr h="523875">
-                <a:tc>
-                  <a:txBody>
-                    <a:bodyPr/>
-                    <a:lstStyle/>
-                    <a:p>
-                      <a:r>
-                        <a:rPr sz="1950">
-                          <a:solidFill>
-                            <a:srgbClr val="15191F"/>
-                          </a:solidFill>
-                          <a:latin typeface="Arial"/>
-                          <a:ea typeface="Arial"/>
-                          <a:cs typeface="Arial"/>
-                        </a:rPr>
-                        <a:t>M069–M085</a:t>
-                      </a:r>
-                    </a:p>
-                  </a:txBody>
-                  <a:tcPr marL="95250" marR="76200" marT="76200" marB="57150">
-                    <a:solidFill>
-                      <a:srgbClr val="FAF9F6"/>
-                    </a:solidFill>
-                  </a:tcPr>
-                </a:tc>
-                <a:tc>
-                  <a:txBody>
-                    <a:bodyPr/>
-                    <a:lstStyle/>
-                    <a:p>
-                      <a:r>
-                        <a:rPr sz="1950">
-                          <a:solidFill>
-                            <a:srgbClr val="15191F"/>
-                          </a:solidFill>
-                          <a:latin typeface="Arial"/>
-                          <a:ea typeface="Arial"/>
-                          <a:cs typeface="Arial"/>
-                        </a:rPr>
-                        <a:t>17 матчей</a:t>
-                      </a:r>
-                    </a:p>
-                  </a:txBody>
-                  <a:tcPr marL="95250" marR="76200" marT="76200" marB="57150">
-                    <a:solidFill>
-                      <a:srgbClr val="FAF9F6"/>
-                    </a:solidFill>
-                  </a:tcPr>
-                </a:tc>
-                <a:tc>
-                  <a:txBody>
-                    <a:bodyPr/>
-                    <a:lstStyle/>
-                    <a:p>
-                      <a:r>
-                        <a:rPr sz="1950">
-                          <a:solidFill>
-                            <a:srgbClr val="15191F"/>
-                          </a:solidFill>
-                          <a:latin typeface="Arial"/>
-                          <a:ea typeface="Arial"/>
-                          <a:cs typeface="Arial"/>
-                        </a:rPr>
-                        <a:t>9 матчей</a:t>
+              <a:tr h="619125">
+                <a:tc>
+                  <a:txBody>
+                    <a:bodyPr/>
+                    <a:lstStyle/>
+                    <a:p>
+                      <a:r>
+                        <a:rPr sz="1875">
+                          <a:solidFill>
+                            <a:srgbClr val="15191F"/>
+                          </a:solidFill>
+                          <a:latin typeface="Arial"/>
+                          <a:ea typeface="Arial"/>
+                          <a:cs typeface="Arial"/>
+                        </a:rPr>
+                        <a:t>S</a:t>
+                      </a:r>
+                    </a:p>
+                  </a:txBody>
+                  <a:tcPr marL="95250" marR="76200" marT="76200" marB="57150">
+                    <a:solidFill>
+                      <a:srgbClr val="FAF9F6"/>
+                    </a:solidFill>
+                  </a:tcPr>
+                </a:tc>
+                <a:tc>
+                  <a:txBody>
+                    <a:bodyPr/>
+                    <a:lstStyle/>
+                    <a:p>
+                      <a:r>
+                        <a:rPr sz="1875">
+                          <a:solidFill>
+                            <a:srgbClr val="15191F"/>
+                          </a:solidFill>
+                          <a:latin typeface="Arial"/>
+                          <a:ea typeface="Arial"/>
+                          <a:cs typeface="Arial"/>
+                        </a:rPr>
+                        <a:t>Наш сводный показатель трёх окон для выбора модели</a:t>
                       </a:r>
                     </a:p>
                   </a:txBody>
@@ -6105,10 +6414,10 @@
       </p:graphicFrame>
       <p:sp>
         <p:nvSpPr>
-          <p:cNvPr id="5" name="Без продаж: утро открытия  /  с продажами: ут">
+          <p:cNvPr id="5" name="S = 0.25 × R₁ + 0.25 × R₂ + 0.50 × R₃">
             <a:extLst xmlns:a="http://schemas.openxmlformats.org/drawingml/2006/main">
               <a:ext uri="{FF2B5EF4-FFF2-40B4-BE49-F238E27FC236}">
-                <a16:creationId xmlns:a16="http://schemas.microsoft.com/office/drawing/2014/main" id="{DB6C73C0-6B09-4E45-A722-CED306A4FC5B}"/>
+                <a16:creationId xmlns:a16="http://schemas.microsoft.com/office/drawing/2014/main" id="{9A6BBF32-1600-470D-8B63-D091A0A85BA3}"/>
               </a:ext>
             </a:extLst>
           </p:cNvPr>
@@ -6119,8 +6428,8 @@
         </p:nvSpPr>
         <p:spPr>
           <a:xfrm xmlns:a="http://schemas.openxmlformats.org/drawingml/2006/main">
-            <a:off x="523875" y="3705225"/>
-            <a:ext cx="11144250" cy="400050"/>
+            <a:off x="523875" y="4095750"/>
+            <a:ext cx="11144250" cy="447675"/>
           </a:xfrm>
           <a:prstGeom xmlns:a="http://schemas.openxmlformats.org/drawingml/2006/main" prst="rect">
             <a:avLst/>
@@ -6136,7 +6445,7 @@
           </a:bodyPr>
           <a:lstStyle xmlns:a="http://schemas.openxmlformats.org/drawingml/2006/main">
             <a:defPPr>
-              <a:defRPr sz="2025" b="1">
+              <a:defRPr sz="2400" b="1">
                 <a:solidFill>
                   <a:srgbClr val="B62730"/>
                 </a:solidFill>
@@ -6148,7 +6457,7 @@
           </a:lstStyle>
           <a:p xmlns:a="http://schemas.openxmlformats.org/drawingml/2006/main">
             <a:pPr>
-              <a:defRPr sz="2025" b="1">
+              <a:defRPr sz="2400" b="1">
                 <a:solidFill>
                   <a:srgbClr val="B62730"/>
                 </a:solidFill>
@@ -6158,7 +6467,7 @@
               </a:defRPr>
             </a:pPr>
             <a:r>
-              <a:rPr sz="2025" b="1">
+              <a:rPr sz="2400" b="1">
                 <a:solidFill>
                   <a:srgbClr val="B62730"/>
                 </a:solidFill>
@@ -6166,17 +6475,17 @@
                 <a:ea typeface="Arial"/>
                 <a:cs typeface="Arial"/>
               </a:rPr>
-              <a:t>Без продаж: утро открытия  /  с продажами: утро O + 7 и O + 27</a:t>
+              <a:t>S = 0.25 × R₁ + 0.25 × R₂ + 0.50 × R₃</a:t>
             </a:r>
           </a:p>
         </p:txBody>
       </p:sp>
       <p:sp>
         <p:nvSpPr>
-          <p:cNvPr id="6" name="Срезы 27 / 7 дней: веса 2/3 и 1/3 внутри пары">
+          <p:cNvPr id="6" name="R смешивает квадраты ошибок: 11/17 без продаж">
             <a:extLst xmlns:a="http://schemas.openxmlformats.org/drawingml/2006/main">
               <a:ext uri="{FF2B5EF4-FFF2-40B4-BE49-F238E27FC236}">
-                <a16:creationId xmlns:a16="http://schemas.microsoft.com/office/drawing/2014/main" id="{986F79FE-6CEA-497F-A9AF-92BA4D5A5A87}"/>
+                <a16:creationId xmlns:a16="http://schemas.microsoft.com/office/drawing/2014/main" id="{466BB357-5542-4FBE-8EAD-D766FB91C1E6}"/>
               </a:ext>
             </a:extLst>
           </p:cNvPr>
@@ -6187,121 +6496,7 @@
         </p:nvSpPr>
         <p:spPr>
           <a:xfrm xmlns:a="http://schemas.openxmlformats.org/drawingml/2006/main">
-            <a:off x="523875" y="4229100"/>
-            <a:ext cx="11144250" cy="1190625"/>
-          </a:xfrm>
-          <a:prstGeom xmlns:a="http://schemas.openxmlformats.org/drawingml/2006/main" prst="rect">
-            <a:avLst/>
-          </a:prstGeom>
-          <a:noFill xmlns:a="http://schemas.openxmlformats.org/drawingml/2006/main"/>
-          <a:ln xmlns:a="http://schemas.openxmlformats.org/drawingml/2006/main" w="0">
-            <a:noFill/>
-          </a:ln>
-        </p:spPr>
-        <p:txBody>
-          <a:bodyPr xmlns:a="http://schemas.openxmlformats.org/drawingml/2006/main" lIns="0" tIns="0" rIns="0" bIns="0">
-            <a:noAutofit/>
-          </a:bodyPr>
-          <a:lstStyle xmlns:a="http://schemas.openxmlformats.org/drawingml/2006/main">
-            <a:defPPr>
-              <a:defRPr sz="2025" b="0">
-                <a:solidFill>
-                  <a:srgbClr val="15191F"/>
-                </a:solidFill>
-                <a:latin typeface="Arial"/>
-                <a:ea typeface="Arial"/>
-                <a:cs typeface="Arial"/>
-              </a:defRPr>
-            </a:defPPr>
-          </a:lstStyle>
-          <a:p xmlns:a="http://schemas.openxmlformats.org/drawingml/2006/main">
-            <a:pPr>
-              <a:defRPr sz="2025" b="0">
-                <a:solidFill>
-                  <a:srgbClr val="15191F"/>
-                </a:solidFill>
-                <a:latin typeface="Arial"/>
-                <a:ea typeface="Arial"/>
-                <a:cs typeface="Arial"/>
-              </a:defRPr>
-            </a:pPr>
-            <a:r>
-              <a:rPr sz="2025" b="0">
-                <a:solidFill>
-                  <a:srgbClr val="15191F"/>
-                </a:solidFill>
-                <a:latin typeface="Arial"/>
-                <a:ea typeface="Arial"/>
-                <a:cs typeface="Arial"/>
-              </a:rPr>
-              <a:t>Срезы 27 / 7 дней: веса 2/3 и 1/3 внутри пары матч–зона</a:t>
-            </a:r>
-          </a:p>
-          <a:p xmlns:a="http://schemas.openxmlformats.org/drawingml/2006/main">
-            <a:pPr>
-              <a:defRPr sz="2025" b="0">
-                <a:solidFill>
-                  <a:srgbClr val="15191F"/>
-                </a:solidFill>
-                <a:latin typeface="Arial"/>
-                <a:ea typeface="Arial"/>
-                <a:cs typeface="Arial"/>
-              </a:defRPr>
-            </a:pPr>
-            <a:r>
-              <a:rPr sz="2025" b="0">
-                <a:solidFill>
-                  <a:srgbClr val="15191F"/>
-                </a:solidFill>
-                <a:latin typeface="Arial"/>
-                <a:ea typeface="Arial"/>
-                <a:cs typeface="Arial"/>
-              </a:rPr>
-              <a:t>История и обучение только до отсечки; будущие продажи исключены</a:t>
-            </a:r>
-          </a:p>
-          <a:p xmlns:a="http://schemas.openxmlformats.org/drawingml/2006/main">
-            <a:pPr>
-              <a:defRPr sz="2025" b="0">
-                <a:solidFill>
-                  <a:srgbClr val="15191F"/>
-                </a:solidFill>
-                <a:latin typeface="Arial"/>
-                <a:ea typeface="Arial"/>
-                <a:cs typeface="Arial"/>
-              </a:defRPr>
-            </a:pPr>
-            <a:r>
-              <a:rPr sz="2025" b="0">
-                <a:solidFill>
-                  <a:srgbClr val="15191F"/>
-                </a:solidFill>
-                <a:latin typeface="Arial"/>
-                <a:ea typeface="Arial"/>
-                <a:cs typeface="Arial"/>
-              </a:rPr>
-              <a:t>Все 8 зон матча вместе. Всего 51 уникальный проверочный матч</a:t>
-            </a:r>
-          </a:p>
-        </p:txBody>
-      </p:sp>
-      <p:sp>
-        <p:nvSpPr>
-          <p:cNvPr id="7" name="Все 3 окна участвовали в выборе. Независимого">
-            <a:extLst xmlns:a="http://schemas.openxmlformats.org/drawingml/2006/main">
-              <a:ext uri="{FF2B5EF4-FFF2-40B4-BE49-F238E27FC236}">
-                <a16:creationId xmlns:a16="http://schemas.microsoft.com/office/drawing/2014/main" id="{6050F485-7548-4F26-80E3-652C4ED55C24}"/>
-              </a:ext>
-            </a:extLst>
-          </p:cNvPr>
-          <p:cNvSpPr>
-            <a:spLocks xmlns:a="http://schemas.openxmlformats.org/drawingml/2006/main" noGrp="1"/>
-          </p:cNvSpPr>
-          <p:nvPr/>
-        </p:nvSpPr>
-        <p:spPr>
-          <a:xfrm xmlns:a="http://schemas.openxmlformats.org/drawingml/2006/main">
-            <a:off x="523875" y="5686425"/>
+            <a:off x="523875" y="4752975"/>
             <a:ext cx="11144250" cy="409575"/>
           </a:xfrm>
           <a:prstGeom xmlns:a="http://schemas.openxmlformats.org/drawingml/2006/main" prst="rect">
@@ -6318,9 +6513,9 @@
           </a:bodyPr>
           <a:lstStyle xmlns:a="http://schemas.openxmlformats.org/drawingml/2006/main">
             <a:defPPr>
-              <a:defRPr sz="2025" b="1">
-                <a:solidFill>
-                  <a:srgbClr val="B62730"/>
+              <a:defRPr sz="1950" b="0">
+                <a:solidFill>
+                  <a:srgbClr val="15191F"/>
                 </a:solidFill>
                 <a:latin typeface="Arial"/>
                 <a:ea typeface="Arial"/>
@@ -6330,9 +6525,9 @@
           </a:lstStyle>
           <a:p xmlns:a="http://schemas.openxmlformats.org/drawingml/2006/main">
             <a:pPr>
-              <a:defRPr sz="2025" b="1">
-                <a:solidFill>
-                  <a:srgbClr val="B62730"/>
+              <a:defRPr sz="1950" b="0">
+                <a:solidFill>
+                  <a:srgbClr val="15191F"/>
                 </a:solidFill>
                 <a:latin typeface="Arial"/>
                 <a:ea typeface="Arial"/>
@@ -6340,15 +6535,174 @@
               </a:defRPr>
             </a:pPr>
             <a:r>
-              <a:rPr sz="2025" b="1">
+              <a:rPr sz="1950" b="0">
+                <a:solidFill>
+                  <a:srgbClr val="15191F"/>
+                </a:solidFill>
+                <a:latin typeface="Arial"/>
+                <a:ea typeface="Arial"/>
+                <a:cs typeface="Arial"/>
+              </a:rPr>
+              <a:t>R смешивает квадраты ошибок: 11/17 без продаж и 6/17 с продажами</a:t>
+            </a:r>
+          </a:p>
+        </p:txBody>
+      </p:sp>
+      <p:sp>
+        <p:nvSpPr>
+          <p:cNvPr id="7" name="Окна: M035–051, M052–068, M069–085. История т">
+            <a:extLst xmlns:a="http://schemas.openxmlformats.org/drawingml/2006/main">
+              <a:ext uri="{FF2B5EF4-FFF2-40B4-BE49-F238E27FC236}">
+                <a16:creationId xmlns:a16="http://schemas.microsoft.com/office/drawing/2014/main" id="{43E40D1D-92BC-4C4B-ABD8-FA09F86F7DA6}"/>
+              </a:ext>
+            </a:extLst>
+          </p:cNvPr>
+          <p:cNvSpPr>
+            <a:spLocks xmlns:a="http://schemas.openxmlformats.org/drawingml/2006/main" noGrp="1"/>
+          </p:cNvSpPr>
+          <p:nvPr/>
+        </p:nvSpPr>
+        <p:spPr>
+          <a:xfrm xmlns:a="http://schemas.openxmlformats.org/drawingml/2006/main">
+            <a:off x="523875" y="5324475"/>
+            <a:ext cx="11144250" cy="723900"/>
+          </a:xfrm>
+          <a:prstGeom xmlns:a="http://schemas.openxmlformats.org/drawingml/2006/main" prst="rect">
+            <a:avLst/>
+          </a:prstGeom>
+          <a:noFill xmlns:a="http://schemas.openxmlformats.org/drawingml/2006/main"/>
+          <a:ln xmlns:a="http://schemas.openxmlformats.org/drawingml/2006/main" w="0">
+            <a:noFill/>
+          </a:ln>
+        </p:spPr>
+        <p:txBody>
+          <a:bodyPr xmlns:a="http://schemas.openxmlformats.org/drawingml/2006/main" lIns="0" tIns="0" rIns="0" bIns="0">
+            <a:noAutofit/>
+          </a:bodyPr>
+          <a:lstStyle xmlns:a="http://schemas.openxmlformats.org/drawingml/2006/main">
+            <a:defPPr>
+              <a:defRPr sz="1800" b="0">
+                <a:solidFill>
+                  <a:srgbClr val="15191F"/>
+                </a:solidFill>
+                <a:latin typeface="Arial"/>
+                <a:ea typeface="Arial"/>
+                <a:cs typeface="Arial"/>
+              </a:defRPr>
+            </a:defPPr>
+          </a:lstStyle>
+          <a:p xmlns:a="http://schemas.openxmlformats.org/drawingml/2006/main">
+            <a:pPr>
+              <a:defRPr sz="1800" b="0">
+                <a:solidFill>
+                  <a:srgbClr val="15191F"/>
+                </a:solidFill>
+                <a:latin typeface="Arial"/>
+                <a:ea typeface="Arial"/>
+                <a:cs typeface="Arial"/>
+              </a:defRPr>
+            </a:pPr>
+            <a:r>
+              <a:rPr sz="1800" b="0">
+                <a:solidFill>
+                  <a:srgbClr val="15191F"/>
+                </a:solidFill>
+                <a:latin typeface="Arial"/>
+                <a:ea typeface="Arial"/>
+                <a:cs typeface="Arial"/>
+              </a:rPr>
+              <a:t>Окна: M035–051, M052–068, M069–085. История только до окна и отсечки</a:t>
+            </a:r>
+          </a:p>
+          <a:p xmlns:a="http://schemas.openxmlformats.org/drawingml/2006/main">
+            <a:pPr>
+              <a:defRPr sz="1800" b="0">
+                <a:solidFill>
+                  <a:srgbClr val="15191F"/>
+                </a:solidFill>
+                <a:latin typeface="Arial"/>
+                <a:ea typeface="Arial"/>
+                <a:cs typeface="Arial"/>
+              </a:defRPr>
+            </a:pPr>
+            <a:r>
+              <a:rPr sz="1800" b="0">
+                <a:solidFill>
+                  <a:srgbClr val="15191F"/>
+                </a:solidFill>
+                <a:latin typeface="Arial"/>
+                <a:ea typeface="Arial"/>
+                <a:cs typeface="Arial"/>
+              </a:rPr>
+              <a:t>Без продаж: утро открытия; с продажами: O + 7 / O + 27, веса 1/3 / 2/3</a:t>
+            </a:r>
+          </a:p>
+        </p:txBody>
+      </p:sp>
+      <p:sp>
+        <p:nvSpPr>
+          <p:cNvPr id="8" name="Все окна участвовали в выборе. Независимого т">
+            <a:extLst xmlns:a="http://schemas.openxmlformats.org/drawingml/2006/main">
+              <a:ext uri="{FF2B5EF4-FFF2-40B4-BE49-F238E27FC236}">
+                <a16:creationId xmlns:a16="http://schemas.microsoft.com/office/drawing/2014/main" id="{8FAAC701-5123-4AC4-B980-6EBE9037B889}"/>
+              </a:ext>
+            </a:extLst>
+          </p:cNvPr>
+          <p:cNvSpPr>
+            <a:spLocks xmlns:a="http://schemas.openxmlformats.org/drawingml/2006/main" noGrp="1"/>
+          </p:cNvSpPr>
+          <p:nvPr/>
+        </p:nvSpPr>
+        <p:spPr>
+          <a:xfrm xmlns:a="http://schemas.openxmlformats.org/drawingml/2006/main">
+            <a:off x="523875" y="6057900"/>
+            <a:ext cx="11144250" cy="266700"/>
+          </a:xfrm>
+          <a:prstGeom xmlns:a="http://schemas.openxmlformats.org/drawingml/2006/main" prst="rect">
+            <a:avLst/>
+          </a:prstGeom>
+          <a:noFill xmlns:a="http://schemas.openxmlformats.org/drawingml/2006/main"/>
+          <a:ln xmlns:a="http://schemas.openxmlformats.org/drawingml/2006/main" w="0">
+            <a:noFill/>
+          </a:ln>
+        </p:spPr>
+        <p:txBody>
+          <a:bodyPr xmlns:a="http://schemas.openxmlformats.org/drawingml/2006/main" lIns="0" tIns="0" rIns="0" bIns="0">
+            <a:noAutofit/>
+          </a:bodyPr>
+          <a:lstStyle xmlns:a="http://schemas.openxmlformats.org/drawingml/2006/main">
+            <a:defPPr>
+              <a:defRPr sz="1725" b="1">
                 <a:solidFill>
                   <a:srgbClr val="B62730"/>
                 </a:solidFill>
                 <a:latin typeface="Arial"/>
                 <a:ea typeface="Arial"/>
                 <a:cs typeface="Arial"/>
+              </a:defRPr>
+            </a:defPPr>
+          </a:lstStyle>
+          <a:p xmlns:a="http://schemas.openxmlformats.org/drawingml/2006/main">
+            <a:pPr>
+              <a:defRPr sz="1725" b="1">
+                <a:solidFill>
+                  <a:srgbClr val="B62730"/>
+                </a:solidFill>
+                <a:latin typeface="Arial"/>
+                <a:ea typeface="Arial"/>
+                <a:cs typeface="Arial"/>
+              </a:defRPr>
+            </a:pPr>
+            <a:r>
+              <a:rPr sz="1725" b="1">
+                <a:solidFill>
+                  <a:srgbClr val="B62730"/>
+                </a:solidFill>
+                <a:latin typeface="Arial"/>
+                <a:ea typeface="Arial"/>
+                <a:cs typeface="Arial"/>
               </a:rPr>
-              <a:t>Все 3 окна участвовали в выборе. Независимого теста нет</a:t>
+              <a:t>Все окна участвовали в выборе. Независимого теста нет</a:t>
             </a:r>
           </a:p>
         </p:txBody>
@@ -6356,7 +6710,7 @@
     </p:spTree>
     <p:extLst>
       <p:ext uri="{BB962C8B-B14F-4D97-AF65-F5344CB8AC3E}">
-        <p14:creationId xmlns:p14="http://schemas.microsoft.com/office/powerpoint/2010/main" val="630793472"/>
+        <p14:creationId xmlns:p14="http://schemas.microsoft.com/office/powerpoint/2010/main" val="63518558"/>
       </p:ext>
     </p:extLst>
   </p:cSld>
@@ -6387,7 +6741,7 @@
           <p:cNvPr id="10" name="Качество против среднего по зоне">
             <a:extLst xmlns:a="http://schemas.openxmlformats.org/drawingml/2006/main">
               <a:ext uri="{FF2B5EF4-FFF2-40B4-BE49-F238E27FC236}">
-                <a16:creationId xmlns:a16="http://schemas.microsoft.com/office/drawing/2014/main" id="{784AEA21-5DDC-4410-A4B7-B193C0A225EB}"/>
+                <a16:creationId xmlns:a16="http://schemas.microsoft.com/office/drawing/2014/main" id="{0B3C15A0-91F7-4C16-AA13-80FC8FA66821}"/>
               </a:ext>
             </a:extLst>
           </p:cNvPr>
@@ -6455,7 +6809,7 @@
           <p:cNvPr id="2" name="СпускоГрад  /  DATA MATCH">
             <a:extLst xmlns:a="http://schemas.openxmlformats.org/drawingml/2006/main">
               <a:ext uri="{FF2B5EF4-FFF2-40B4-BE49-F238E27FC236}">
-                <a16:creationId xmlns:a16="http://schemas.microsoft.com/office/drawing/2014/main" id="{E6A7BE34-A747-4DA1-98AE-A309ABA14DEB}"/>
+                <a16:creationId xmlns:a16="http://schemas.microsoft.com/office/drawing/2014/main" id="{75245AB6-38B3-456F-8C4F-8ADB652B4B20}"/>
               </a:ext>
             </a:extLst>
           </p:cNvPr>
@@ -6523,7 +6877,7 @@
           <p:cNvPr id="3" name="05">
             <a:extLst xmlns:a="http://schemas.openxmlformats.org/drawingml/2006/main">
               <a:ext uri="{FF2B5EF4-FFF2-40B4-BE49-F238E27FC236}">
-                <a16:creationId xmlns:a16="http://schemas.microsoft.com/office/drawing/2014/main" id="{DA18CBE9-D859-48D9-8620-71136CAA3A60}"/>
+                <a16:creationId xmlns:a16="http://schemas.microsoft.com/office/drawing/2014/main" id="{6AE34528-8080-4D83-9740-F7C5A2B5FD12}"/>
               </a:ext>
             </a:extLst>
           </p:cNvPr>
@@ -6591,7 +6945,7 @@
           <p:cNvPr id="4" name="S 126.736  против 139.155">
             <a:extLst xmlns:a="http://schemas.openxmlformats.org/drawingml/2006/main">
               <a:ext uri="{FF2B5EF4-FFF2-40B4-BE49-F238E27FC236}">
-                <a16:creationId xmlns:a16="http://schemas.microsoft.com/office/drawing/2014/main" id="{5038952D-7221-42AA-A000-D3FC57896E40}"/>
+                <a16:creationId xmlns:a16="http://schemas.microsoft.com/office/drawing/2014/main" id="{D3FA7EE5-CAD1-4376-ADB9-30EA02055412}"/>
               </a:ext>
             </a:extLst>
           </p:cNvPr>
@@ -6659,7 +7013,7 @@
           <p:cNvPr id="5" name="−8.92%">
             <a:extLst xmlns:a="http://schemas.openxmlformats.org/drawingml/2006/main">
               <a:ext uri="{FF2B5EF4-FFF2-40B4-BE49-F238E27FC236}">
-                <a16:creationId xmlns:a16="http://schemas.microsoft.com/office/drawing/2014/main" id="{9383C293-C7D9-46D7-B7CC-4AD67A49A9D6}"/>
+                <a16:creationId xmlns:a16="http://schemas.microsoft.com/office/drawing/2014/main" id="{5FB34714-F00F-415F-A4D5-BF3E568E350C}"/>
               </a:ext>
             </a:extLst>
           </p:cNvPr>
@@ -6727,7 +7081,7 @@
           <p:cNvPr id="6" name="">
             <a:extLst xmlns:a="http://schemas.openxmlformats.org/drawingml/2006/main">
               <a:ext uri="{FF2B5EF4-FFF2-40B4-BE49-F238E27FC236}">
-                <a16:creationId xmlns:a16="http://schemas.microsoft.com/office/drawing/2014/main" id="{997EA2A7-B695-4760-ABD8-B2A55E6B2A17}"/>
+                <a16:creationId xmlns:a16="http://schemas.microsoft.com/office/drawing/2014/main" id="{34FEF613-9A06-48CE-B9E4-C5CE446203CE}"/>
               </a:ext>
             </a:extLst>
           </p:cNvPr>
@@ -7489,10 +7843,10 @@
       </p:graphicFrame>
       <p:sp>
         <p:nvSpPr>
-          <p:cNvPr id="7" name="B - среднее по зоне, M - модель. Ошибки в бил">
+          <p:cNvPr id="7" name="B - среднее по зоне, M - модель: сравнение вн">
             <a:extLst xmlns:a="http://schemas.openxmlformats.org/drawingml/2006/main">
               <a:ext uri="{FF2B5EF4-FFF2-40B4-BE49-F238E27FC236}">
-                <a16:creationId xmlns:a16="http://schemas.microsoft.com/office/drawing/2014/main" id="{D2B49745-F221-4D9D-B8A9-76BE35DFBD6F}"/>
+                <a16:creationId xmlns:a16="http://schemas.microsoft.com/office/drawing/2014/main" id="{59BEA85C-276F-4FF9-A6CB-3C36A1D33A32}"/>
               </a:ext>
             </a:extLst>
           </p:cNvPr>
@@ -7550,17 +7904,17 @@
                 <a:ea typeface="Arial"/>
                 <a:cs typeface="Arial"/>
               </a:rPr>
-              <a:t>B - среднее по зоне, M - модель. Ошибки в билетах; меньше лучше</a:t>
+              <a:t>B - среднее по зоне, M - модель: сравнение внутри одного сценария</a:t>
             </a:r>
           </a:p>
         </p:txBody>
       </p:sp>
       <p:sp>
         <p:nvSpPr>
-          <p:cNvPr id="8" name="Сценарные S, baseline / модель: без 143.913 /">
+          <p:cNvPr id="8" name="Сценарии между собой не измеряют пользу ранни">
             <a:extLst xmlns:a="http://schemas.openxmlformats.org/drawingml/2006/main">
               <a:ext uri="{FF2B5EF4-FFF2-40B4-BE49-F238E27FC236}">
-                <a16:creationId xmlns:a16="http://schemas.microsoft.com/office/drawing/2014/main" id="{1EBEFE02-4A56-43FC-B5A5-28EE1FEDB845}"/>
+                <a16:creationId xmlns:a16="http://schemas.microsoft.com/office/drawing/2014/main" id="{42270E62-AC3A-41F9-8150-F65A78092742}"/>
               </a:ext>
             </a:extLst>
           </p:cNvPr>
@@ -7618,7 +7972,7 @@
                 <a:ea typeface="Arial"/>
                 <a:cs typeface="Arial"/>
               </a:rPr>
-              <a:t>Сценарные S, baseline / модель: без 143.913 / 132.941; с 129.748 / 114.459</a:t>
+              <a:t>Сценарии между собой не измеряют пользу ранних продаж</a:t>
             </a:r>
           </a:p>
         </p:txBody>
@@ -7628,7 +7982,7 @@
           <p:cNvPr id="9" name="R = √(11/17 × MSEбез + 6/17 × MSEс); S = 0.25">
             <a:extLst xmlns:a="http://schemas.openxmlformats.org/drawingml/2006/main">
               <a:ext uri="{FF2B5EF4-FFF2-40B4-BE49-F238E27FC236}">
-                <a16:creationId xmlns:a16="http://schemas.microsoft.com/office/drawing/2014/main" id="{3A4F42E9-858E-48E4-BE92-45C273B6D7DB}"/>
+                <a16:creationId xmlns:a16="http://schemas.microsoft.com/office/drawing/2014/main" id="{35D517E2-2E8E-496B-9243-7E0D33481485}"/>
               </a:ext>
             </a:extLst>
           </p:cNvPr>
@@ -7694,7 +8048,7 @@
     </p:spTree>
     <p:extLst>
       <p:ext uri="{BB962C8B-B14F-4D97-AF65-F5344CB8AC3E}">
-        <p14:creationId xmlns:p14="http://schemas.microsoft.com/office/powerpoint/2010/main" val="1466138402"/>
+        <p14:creationId xmlns:p14="http://schemas.microsoft.com/office/powerpoint/2010/main" val="1567978653"/>
       </p:ext>
     </p:extLst>
   </p:cSld>
@@ -7725,7 +8079,7 @@
           <p:cNvPr id="10" name="Качество по ценовым зонам">
             <a:extLst xmlns:a="http://schemas.openxmlformats.org/drawingml/2006/main">
               <a:ext uri="{FF2B5EF4-FFF2-40B4-BE49-F238E27FC236}">
-                <a16:creationId xmlns:a16="http://schemas.microsoft.com/office/drawing/2014/main" id="{8DBD4F7E-AB3B-47A4-B6E6-C483C254714E}"/>
+                <a16:creationId xmlns:a16="http://schemas.microsoft.com/office/drawing/2014/main" id="{24BD2CF7-29F5-4F7F-BED7-F1BCC10765CB}"/>
               </a:ext>
             </a:extLst>
           </p:cNvPr>
@@ -7793,7 +8147,7 @@
           <p:cNvPr id="2" name="СпускоГрад  /  DATA MATCH">
             <a:extLst xmlns:a="http://schemas.openxmlformats.org/drawingml/2006/main">
               <a:ext uri="{FF2B5EF4-FFF2-40B4-BE49-F238E27FC236}">
-                <a16:creationId xmlns:a16="http://schemas.microsoft.com/office/drawing/2014/main" id="{0A742FAE-183E-4F06-9E8C-D8F45FA951B4}"/>
+                <a16:creationId xmlns:a16="http://schemas.microsoft.com/office/drawing/2014/main" id="{8AC32CCA-B45C-480D-B67A-D433D6633941}"/>
               </a:ext>
             </a:extLst>
           </p:cNvPr>
@@ -7861,7 +8215,7 @@
           <p:cNvPr id="3" name="06">
             <a:extLst xmlns:a="http://schemas.openxmlformats.org/drawingml/2006/main">
               <a:ext uri="{FF2B5EF4-FFF2-40B4-BE49-F238E27FC236}">
-                <a16:creationId xmlns:a16="http://schemas.microsoft.com/office/drawing/2014/main" id="{25C0D323-31AE-4261-8B3E-B9089E7BFFCD}"/>
+                <a16:creationId xmlns:a16="http://schemas.microsoft.com/office/drawing/2014/main" id="{468003D9-97E6-4EF8-A001-EBF6DED97596}"/>
               </a:ext>
             </a:extLst>
           </p:cNvPr>
@@ -7929,7 +8283,7 @@
           <p:cNvPr id="4" name="S зоны: baseline / модель">
             <a:extLst xmlns:a="http://schemas.openxmlformats.org/drawingml/2006/main">
               <a:ext uri="{FF2B5EF4-FFF2-40B4-BE49-F238E27FC236}">
-                <a16:creationId xmlns:a16="http://schemas.microsoft.com/office/drawing/2014/main" id="{1F0CF351-910F-462B-9326-071614BAE834}"/>
+                <a16:creationId xmlns:a16="http://schemas.microsoft.com/office/drawing/2014/main" id="{2FC1946C-8F97-407D-8A5C-E16D442D93D5}"/>
               </a:ext>
             </a:extLst>
           </p:cNvPr>
@@ -7997,7 +8351,7 @@
           <p:cNvPr id="5" name="Chart">
             <a:extLst xmlns:a="http://schemas.openxmlformats.org/drawingml/2006/main">
               <a:ext uri="{FF2B5EF4-FFF2-40B4-BE49-F238E27FC236}">
-                <a16:creationId xmlns:a16="http://schemas.microsoft.com/office/drawing/2014/main" id="{FE26FBEB-AFC8-438A-82F7-C5E2F623107F}"/>
+                <a16:creationId xmlns:a16="http://schemas.microsoft.com/office/drawing/2014/main" id="{A80025F1-B387-491B-9A82-283C706EEA61}"/>
               </a:ext>
             </a:extLst>
           </p:cNvPr>
@@ -8010,7 +8364,7 @@
         </p:xfrm>
         <a:graphic xmlns:a="http://schemas.openxmlformats.org/drawingml/2006/main">
           <a:graphicData uri="http://schemas.openxmlformats.org/drawingml/2006/chart">
-            <c:chart xmlns:r="http://schemas.openxmlformats.org/officeDocument/2006/relationships" xmlns:c="http://schemas.openxmlformats.org/drawingml/2006/chart" r:id="Rc7dd54eddb1c4939"/>
+            <c:chart xmlns:r="http://schemas.openxmlformats.org/officeDocument/2006/relationships" xmlns:c="http://schemas.openxmlformats.org/drawingml/2006/chart" r:id="Rfdcf4fc5465b46f1"/>
           </a:graphicData>
         </a:graphic>
       </p:graphicFrame>
@@ -8019,7 +8373,7 @@
           <p:cNvPr id="6" name="RMSE сценариев: baseline / модель">
             <a:extLst xmlns:a="http://schemas.openxmlformats.org/drawingml/2006/main">
               <a:ext uri="{FF2B5EF4-FFF2-40B4-BE49-F238E27FC236}">
-                <a16:creationId xmlns:a16="http://schemas.microsoft.com/office/drawing/2014/main" id="{9B5B052E-F98C-4C10-8C44-893A3C6CA85E}"/>
+                <a16:creationId xmlns:a16="http://schemas.microsoft.com/office/drawing/2014/main" id="{096AACA2-9CD1-4265-B4A6-ED6F5ABA764F}"/>
               </a:ext>
             </a:extLst>
           </p:cNvPr>
@@ -8087,7 +8441,7 @@
           <p:cNvPr id="7" name="">
             <a:extLst xmlns:a="http://schemas.openxmlformats.org/drawingml/2006/main">
               <a:ext uri="{FF2B5EF4-FFF2-40B4-BE49-F238E27FC236}">
-                <a16:creationId xmlns:a16="http://schemas.microsoft.com/office/drawing/2014/main" id="{FCD527A5-C46F-4C33-A7C0-4AD05E4071A0}"/>
+                <a16:creationId xmlns:a16="http://schemas.microsoft.com/office/drawing/2014/main" id="{3B9867B4-9BC5-4530-A79C-6E6CF091224A}"/>
               </a:ext>
             </a:extLst>
           </p:cNvPr>
@@ -8782,7 +9136,7 @@
           <p:cNvPr id="8" name="На зону: n без / с = 51 / 36">
             <a:extLst xmlns:a="http://schemas.openxmlformats.org/drawingml/2006/main">
               <a:ext uri="{FF2B5EF4-FFF2-40B4-BE49-F238E27FC236}">
-                <a16:creationId xmlns:a16="http://schemas.microsoft.com/office/drawing/2014/main" id="{2335168E-1053-48B5-94D4-C44967288679}"/>
+                <a16:creationId xmlns:a16="http://schemas.microsoft.com/office/drawing/2014/main" id="{204DE254-9A85-491C-8ADC-ACB3804B8A81}"/>
               </a:ext>
             </a:extLst>
           </p:cNvPr>
@@ -8850,7 +9204,7 @@
           <p:cNvPr id="9" name="Модель хуже в зонах 1 и 3; наибольшая S у зон">
             <a:extLst xmlns:a="http://schemas.openxmlformats.org/drawingml/2006/main">
               <a:ext uri="{FF2B5EF4-FFF2-40B4-BE49-F238E27FC236}">
-                <a16:creationId xmlns:a16="http://schemas.microsoft.com/office/drawing/2014/main" id="{F8E1295D-4337-4970-99F7-57D237A32C5E}"/>
+                <a16:creationId xmlns:a16="http://schemas.microsoft.com/office/drawing/2014/main" id="{DF5F6465-ECF6-40E3-A12B-D555383213D6}"/>
               </a:ext>
             </a:extLst>
           </p:cNvPr>
@@ -8916,7 +9270,7 @@
     </p:spTree>
     <p:extLst>
       <p:ext uri="{BB962C8B-B14F-4D97-AF65-F5344CB8AC3E}">
-        <p14:creationId xmlns:p14="http://schemas.microsoft.com/office/powerpoint/2010/main" val="1156863595"/>
+        <p14:creationId xmlns:p14="http://schemas.microsoft.com/office/powerpoint/2010/main" val="4593597"/>
       </p:ext>
     </p:extLst>
   </p:cSld>
@@ -8947,7 +9301,7 @@
           <p:cNvPr id="10" name="Ошибки по соперникам и дням недели">
             <a:extLst xmlns:a="http://schemas.openxmlformats.org/drawingml/2006/main">
               <a:ext uri="{FF2B5EF4-FFF2-40B4-BE49-F238E27FC236}">
-                <a16:creationId xmlns:a16="http://schemas.microsoft.com/office/drawing/2014/main" id="{D9F26CCC-0265-4542-AA92-64FDE19E9C24}"/>
+                <a16:creationId xmlns:a16="http://schemas.microsoft.com/office/drawing/2014/main" id="{5DB76144-751F-4E90-A0A1-65355039A968}"/>
               </a:ext>
             </a:extLst>
           </p:cNvPr>
@@ -9015,7 +9369,7 @@
           <p:cNvPr id="2" name="СпускоГрад  /  DATA MATCH">
             <a:extLst xmlns:a="http://schemas.openxmlformats.org/drawingml/2006/main">
               <a:ext uri="{FF2B5EF4-FFF2-40B4-BE49-F238E27FC236}">
-                <a16:creationId xmlns:a16="http://schemas.microsoft.com/office/drawing/2014/main" id="{CDBAD1E9-81D2-4474-8728-622738F2928E}"/>
+                <a16:creationId xmlns:a16="http://schemas.microsoft.com/office/drawing/2014/main" id="{0D0312D4-CF45-4625-B5A7-2FA0EB8C9132}"/>
               </a:ext>
             </a:extLst>
           </p:cNvPr>
@@ -9083,7 +9437,7 @@
           <p:cNvPr id="3" name="07">
             <a:extLst xmlns:a="http://schemas.openxmlformats.org/drawingml/2006/main">
               <a:ext uri="{FF2B5EF4-FFF2-40B4-BE49-F238E27FC236}">
-                <a16:creationId xmlns:a16="http://schemas.microsoft.com/office/drawing/2014/main" id="{5D17AC41-E999-418E-9068-EB8BCDE3283C}"/>
+                <a16:creationId xmlns:a16="http://schemas.microsoft.com/office/drawing/2014/main" id="{078FA940-B8EC-49D2-B6A5-464474DCE6E4}"/>
               </a:ext>
             </a:extLst>
           </p:cNvPr>
@@ -9151,7 +9505,7 @@
           <p:cNvPr id="4" name="Соперники: примеры групп">
             <a:extLst xmlns:a="http://schemas.openxmlformats.org/drawingml/2006/main">
               <a:ext uri="{FF2B5EF4-FFF2-40B4-BE49-F238E27FC236}">
-                <a16:creationId xmlns:a16="http://schemas.microsoft.com/office/drawing/2014/main" id="{B546A9CB-8B97-4A98-B029-C237C1E861ED}"/>
+                <a16:creationId xmlns:a16="http://schemas.microsoft.com/office/drawing/2014/main" id="{5949A9D3-6CDE-45EB-A198-6232B76A46BB}"/>
               </a:ext>
             </a:extLst>
           </p:cNvPr>
@@ -9219,7 +9573,7 @@
           <p:cNvPr id="5" name="Все дни недели">
             <a:extLst xmlns:a="http://schemas.openxmlformats.org/drawingml/2006/main">
               <a:ext uri="{FF2B5EF4-FFF2-40B4-BE49-F238E27FC236}">
-                <a16:creationId xmlns:a16="http://schemas.microsoft.com/office/drawing/2014/main" id="{713C0CC1-DB21-445E-9A4C-AF763186B9BC}"/>
+                <a16:creationId xmlns:a16="http://schemas.microsoft.com/office/drawing/2014/main" id="{67668052-1A80-4C6F-8E61-88C097F4D1FC}"/>
               </a:ext>
             </a:extLst>
           </p:cNvPr>
@@ -9287,7 +9641,7 @@
           <p:cNvPr id="6" name="">
             <a:extLst xmlns:a="http://schemas.openxmlformats.org/drawingml/2006/main">
               <a:ext uri="{FF2B5EF4-FFF2-40B4-BE49-F238E27FC236}">
-                <a16:creationId xmlns:a16="http://schemas.microsoft.com/office/drawing/2014/main" id="{28A1A9A5-DAC3-4A38-8A6D-E4569334EB8B}"/>
+                <a16:creationId xmlns:a16="http://schemas.microsoft.com/office/drawing/2014/main" id="{29047CD6-3425-49BA-B82D-D247CA33803F}"/>
               </a:ext>
             </a:extLst>
           </p:cNvPr>
@@ -9807,7 +10161,7 @@
           <p:cNvPr id="7" name="">
             <a:extLst xmlns:a="http://schemas.openxmlformats.org/drawingml/2006/main">
               <a:ext uri="{FF2B5EF4-FFF2-40B4-BE49-F238E27FC236}">
-                <a16:creationId xmlns:a16="http://schemas.microsoft.com/office/drawing/2014/main" id="{AA3F93BB-5D6F-42DE-80E0-F09E65280211}"/>
+                <a16:creationId xmlns:a16="http://schemas.microsoft.com/office/drawing/2014/main" id="{08B70B85-C8F2-4113-B29C-22515D1E9218}"/>
               </a:ext>
             </a:extLst>
           </p:cNvPr>
@@ -10621,7 +10975,7 @@
           <p:cNvPr id="8" name="n - уникальные матчи; B / M - baseline / моде">
             <a:extLst xmlns:a="http://schemas.openxmlformats.org/drawingml/2006/main">
               <a:ext uri="{FF2B5EF4-FFF2-40B4-BE49-F238E27FC236}">
-                <a16:creationId xmlns:a16="http://schemas.microsoft.com/office/drawing/2014/main" id="{AA8DE4CA-0F90-48DA-A6EB-B4998C85C28D}"/>
+                <a16:creationId xmlns:a16="http://schemas.microsoft.com/office/drawing/2014/main" id="{F028C5A2-822F-481A-A028-05FF17372961}"/>
               </a:ext>
             </a:extLst>
           </p:cNvPr>
@@ -10735,7 +11089,7 @@
           <p:cNvPr id="9" name="Групповые RMSE объединяют окна без весов S. С">
             <a:extLst xmlns:a="http://schemas.openxmlformats.org/drawingml/2006/main">
               <a:ext uri="{FF2B5EF4-FFF2-40B4-BE49-F238E27FC236}">
-                <a16:creationId xmlns:a16="http://schemas.microsoft.com/office/drawing/2014/main" id="{DEC6C186-6045-4D60-A3BF-FCA5BA5E850C}"/>
+                <a16:creationId xmlns:a16="http://schemas.microsoft.com/office/drawing/2014/main" id="{E6DDC68C-FD5E-46C0-8ED5-0DAB0D5BE83D}"/>
               </a:ext>
             </a:extLst>
           </p:cNvPr>
@@ -10801,7 +11155,7 @@
     </p:spTree>
     <p:extLst>
       <p:ext uri="{BB962C8B-B14F-4D97-AF65-F5344CB8AC3E}">
-        <p14:creationId xmlns:p14="http://schemas.microsoft.com/office/powerpoint/2010/main" val="1231580341"/>
+        <p14:creationId xmlns:p14="http://schemas.microsoft.com/office/powerpoint/2010/main" val="1606551813"/>
       </p:ext>
     </p:extLst>
   </p:cSld>
@@ -10832,7 +11186,7 @@
           <p:cNvPr id="7" name="Альтернативы и ограничения">
             <a:extLst xmlns:a="http://schemas.openxmlformats.org/drawingml/2006/main">
               <a:ext uri="{FF2B5EF4-FFF2-40B4-BE49-F238E27FC236}">
-                <a16:creationId xmlns:a16="http://schemas.microsoft.com/office/drawing/2014/main" id="{EDD4B364-46C9-4FD8-90AA-13BCD7C39ED7}"/>
+                <a16:creationId xmlns:a16="http://schemas.microsoft.com/office/drawing/2014/main" id="{CFDE520C-40EC-460E-9561-DD6FB4A2E116}"/>
               </a:ext>
             </a:extLst>
           </p:cNvPr>
@@ -10900,7 +11254,7 @@
           <p:cNvPr id="2" name="СпускоГрад  /  DATA MATCH">
             <a:extLst xmlns:a="http://schemas.openxmlformats.org/drawingml/2006/main">
               <a:ext uri="{FF2B5EF4-FFF2-40B4-BE49-F238E27FC236}">
-                <a16:creationId xmlns:a16="http://schemas.microsoft.com/office/drawing/2014/main" id="{93BD4D75-BE17-46D2-BD89-368D36316706}"/>
+                <a16:creationId xmlns:a16="http://schemas.microsoft.com/office/drawing/2014/main" id="{5E7DCB4A-BD66-40F0-A2DC-1D8A9DB237AD}"/>
               </a:ext>
             </a:extLst>
           </p:cNvPr>
@@ -10968,7 +11322,7 @@
           <p:cNvPr id="3" name="08">
             <a:extLst xmlns:a="http://schemas.openxmlformats.org/drawingml/2006/main">
               <a:ext uri="{FF2B5EF4-FFF2-40B4-BE49-F238E27FC236}">
-                <a16:creationId xmlns:a16="http://schemas.microsoft.com/office/drawing/2014/main" id="{27BCC585-5FB2-4A7A-92BB-48930DBAFCBF}"/>
+                <a16:creationId xmlns:a16="http://schemas.microsoft.com/office/drawing/2014/main" id="{4D36E159-EBF4-4CD3-8BDE-48F9D2E30EC8}"/>
               </a:ext>
             </a:extLst>
           </p:cNvPr>
@@ -11036,7 +11390,7 @@
           <p:cNvPr id="4" name="">
             <a:extLst xmlns:a="http://schemas.openxmlformats.org/drawingml/2006/main">
               <a:ext uri="{FF2B5EF4-FFF2-40B4-BE49-F238E27FC236}">
-                <a16:creationId xmlns:a16="http://schemas.microsoft.com/office/drawing/2014/main" id="{64D48ABD-BBF9-4D79-8EE5-1EEFA5E570F9}"/>
+                <a16:creationId xmlns:a16="http://schemas.microsoft.com/office/drawing/2014/main" id="{B6CCBEC9-134F-4BA6-9D71-1BA5D99C20A0}"/>
               </a:ext>
             </a:extLst>
           </p:cNvPr>
@@ -11435,7 +11789,7 @@
           <p:cNvPr id="5" name="Замена требовала: ≥2% выигрыша, ≥2 лучших око">
             <a:extLst xmlns:a="http://schemas.openxmlformats.org/drawingml/2006/main">
               <a:ext uri="{FF2B5EF4-FFF2-40B4-BE49-F238E27FC236}">
-                <a16:creationId xmlns:a16="http://schemas.microsoft.com/office/drawing/2014/main" id="{88C0FB14-1A4B-4769-8491-4A123514FCF6}"/>
+                <a16:creationId xmlns:a16="http://schemas.microsoft.com/office/drawing/2014/main" id="{D07ACCF1-26E0-44D9-B42C-BF3D307536CD}"/>
               </a:ext>
             </a:extLst>
           </p:cNvPr>
@@ -11503,7 +11857,7 @@
           <p:cNvPr id="6" name="Нет независимого теста; hidden RMSE неизвесте">
             <a:extLst xmlns:a="http://schemas.openxmlformats.org/drawingml/2006/main">
               <a:ext uri="{FF2B5EF4-FFF2-40B4-BE49-F238E27FC236}">
-                <a16:creationId xmlns:a16="http://schemas.microsoft.com/office/drawing/2014/main" id="{055AC74D-6F1C-4FBE-AE70-520067E75274}"/>
+                <a16:creationId xmlns:a16="http://schemas.microsoft.com/office/drawing/2014/main" id="{C0916357-9135-4533-8670-8A6D792B4031}"/>
               </a:ext>
             </a:extLst>
           </p:cNvPr>
@@ -11615,7 +11969,7 @@
     </p:spTree>
     <p:extLst>
       <p:ext uri="{BB962C8B-B14F-4D97-AF65-F5344CB8AC3E}">
-        <p14:creationId xmlns:p14="http://schemas.microsoft.com/office/powerpoint/2010/main" val="1937058300"/>
+        <p14:creationId xmlns:p14="http://schemas.microsoft.com/office/powerpoint/2010/main" val="51557561"/>
       </p:ext>
     </p:extLst>
   </p:cSld>
@@ -11643,10 +11997,10 @@
       </p:grpSpPr>
       <p:sp>
         <p:nvSpPr>
-          <p:cNvPr id="7" name="Рекомендации для клуба">
+          <p:cNvPr id="7" name="Что делать клубу">
             <a:extLst xmlns:a="http://schemas.openxmlformats.org/drawingml/2006/main">
               <a:ext uri="{FF2B5EF4-FFF2-40B4-BE49-F238E27FC236}">
-                <a16:creationId xmlns:a16="http://schemas.microsoft.com/office/drawing/2014/main" id="{5921C9B5-3AA5-4642-A33A-A69A6A4B6055}"/>
+                <a16:creationId xmlns:a16="http://schemas.microsoft.com/office/drawing/2014/main" id="{82B226BB-FC89-41BF-9572-959038E60C58}"/>
               </a:ext>
             </a:extLst>
           </p:cNvPr>
@@ -11704,7 +12058,7 @@
                 <a:ea typeface="Arial"/>
                 <a:cs typeface="Arial"/>
               </a:rPr>
-              <a:t>Рекомендации для клуба</a:t>
+              <a:t>Что делать клубу</a:t>
             </a:r>
           </a:p>
         </p:txBody>
@@ -11714,7 +12068,7 @@
           <p:cNvPr id="2" name="СпускоГрад  /  DATA MATCH">
             <a:extLst xmlns:a="http://schemas.openxmlformats.org/drawingml/2006/main">
               <a:ext uri="{FF2B5EF4-FFF2-40B4-BE49-F238E27FC236}">
-                <a16:creationId xmlns:a16="http://schemas.microsoft.com/office/drawing/2014/main" id="{0817CD34-9002-48BE-8D61-75F69EE13B4D}"/>
+                <a16:creationId xmlns:a16="http://schemas.microsoft.com/office/drawing/2014/main" id="{F6A02C34-715A-43D3-B80A-D9BCB2ADBD9A}"/>
               </a:ext>
             </a:extLst>
           </p:cNvPr>
@@ -11782,7 +12136,7 @@
           <p:cNvPr id="3" name="09">
             <a:extLst xmlns:a="http://schemas.openxmlformats.org/drawingml/2006/main">
               <a:ext uri="{FF2B5EF4-FFF2-40B4-BE49-F238E27FC236}">
-                <a16:creationId xmlns:a16="http://schemas.microsoft.com/office/drawing/2014/main" id="{CB896B35-5657-485F-AE5B-EBAE276B2525}"/>
+                <a16:creationId xmlns:a16="http://schemas.microsoft.com/office/drawing/2014/main" id="{E03ED034-B928-4355-BC32-02A54B5159E9}"/>
               </a:ext>
             </a:extLst>
           </p:cNvPr>
@@ -11850,7 +12204,7 @@
           <p:cNvPr id="4" name="">
             <a:extLst xmlns:a="http://schemas.openxmlformats.org/drawingml/2006/main">
               <a:ext uri="{FF2B5EF4-FFF2-40B4-BE49-F238E27FC236}">
-                <a16:creationId xmlns:a16="http://schemas.microsoft.com/office/drawing/2014/main" id="{BBF5D486-F4B1-4B90-A939-3B222BDFFFE1}"/>
+                <a16:creationId xmlns:a16="http://schemas.microsoft.com/office/drawing/2014/main" id="{ADE0222C-E467-4A4E-962F-A8E24BB1942D}"/>
               </a:ext>
             </a:extLst>
           </p:cNvPr>
@@ -11858,8 +12212,8 @@
           <p:nvPr/>
         </p:nvGraphicFramePr>
         <p:xfrm>
-          <a:off xmlns:a="http://schemas.openxmlformats.org/drawingml/2006/main" x="523875" y="1533525"/>
-          <a:ext xmlns:a="http://schemas.openxmlformats.org/drawingml/2006/main" cx="11144250" cy="3314700"/>
+          <a:off xmlns:a="http://schemas.openxmlformats.org/drawingml/2006/main" x="523875" y="1476375"/>
+          <a:ext xmlns:a="http://schemas.openxmlformats.org/drawingml/2006/main" cx="11144250" cy="3409950"/>
         </p:xfrm>
         <a:graphic xmlns:a="http://schemas.openxmlformats.org/drawingml/2006/main">
           <a:graphicData uri="http://schemas.openxmlformats.org/drawingml/2006/table">
@@ -11870,14 +12224,14 @@
                 <a:gridCol w="3714750"/>
                 <a:gridCol w="3714750"/>
               </a:tblGrid>
-              <a:tr h="828675">
-                <a:tc>
-                  <a:txBody>
-                    <a:bodyPr/>
-                    <a:lstStyle/>
-                    <a:p>
-                      <a:r>
-                        <a:rPr sz="1875" b="1">
+              <a:tr h="852488">
+                <a:tc>
+                  <a:txBody>
+                    <a:bodyPr/>
+                    <a:lstStyle/>
+                    <a:p>
+                      <a:r>
+                        <a:rPr sz="1800" b="1">
                           <a:solidFill>
                             <a:srgbClr val="FFFFFF"/>
                           </a:solidFill>
@@ -11901,7 +12255,7 @@
                     <a:lstStyle/>
                     <a:p>
                       <a:r>
-                        <a:rPr sz="1875" b="1">
+                        <a:rPr sz="1800" b="1">
                           <a:solidFill>
                             <a:srgbClr val="FFFFFF"/>
                           </a:solidFill>
@@ -11909,7 +12263,7 @@
                           <a:ea typeface="Arial"/>
                           <a:cs typeface="Arial"/>
                         </a:rPr>
-                        <a:t>Действие</a:t>
+                        <a:t>Действие клуба</a:t>
                       </a:r>
                     </a:p>
                   </a:txBody>
@@ -11925,7 +12279,7 @@
                     <a:lstStyle/>
                     <a:p>
                       <a:r>
-                        <a:rPr sz="1875" b="1">
+                        <a:rPr sz="1800" b="1">
                           <a:solidFill>
                             <a:srgbClr val="FFFFFF"/>
                           </a:solidFill>
@@ -11933,7 +12287,7 @@
                           <a:ea typeface="Arial"/>
                           <a:cs typeface="Arial"/>
                         </a:rPr>
-                        <a:t>Как проверить пользу</a:t>
+                        <a:t>Как проверить</a:t>
                       </a:r>
                     </a:p>
                   </a:txBody>
@@ -11944,109 +12298,109 @@
                   </a:tcPr>
                 </a:tc>
               </a:tr>
-              <a:tr h="828675">
-                <a:tc>
-                  <a:txBody>
-                    <a:bodyPr/>
-                    <a:lstStyle/>
-                    <a:p>
-                      <a:r>
-                        <a:rPr sz="1875">
-                          <a:solidFill>
-                            <a:srgbClr val="15191F"/>
-                          </a:solidFill>
-                          <a:latin typeface="Arial"/>
-                          <a:ea typeface="Arial"/>
-                          <a:cs typeface="Arial"/>
-                        </a:rPr>
-                        <a:t>Ошибка неоднородна; зона 6</a:t>
-                      </a:r>
-                    </a:p>
-                    <a:p>
-                      <a:r>
-                        <a:rPr sz="1875">
-                          <a:solidFill>
-                            <a:srgbClr val="15191F"/>
-                          </a:solidFill>
-                          <a:latin typeface="Arial"/>
-                          <a:ea typeface="Arial"/>
-                          <a:cs typeface="Arial"/>
-                        </a:rPr>
-                        <a:t>S 233.7, зоны 1 и 3 хуже baseline</a:t>
-                      </a:r>
-                    </a:p>
-                  </a:txBody>
-                  <a:tcPr marL="95250" marR="76200" marT="76200" marB="57150">
-                    <a:solidFill>
-                      <a:srgbClr val="FAF9F6"/>
-                    </a:solidFill>
-                  </a:tcPr>
-                </a:tc>
-                <a:tc>
-                  <a:txBody>
-                    <a:bodyPr/>
-                    <a:lstStyle/>
-                    <a:p>
-                      <a:r>
-                        <a:rPr sz="1875">
-                          <a:solidFill>
-                            <a:srgbClr val="15191F"/>
-                          </a:solidFill>
-                          <a:latin typeface="Arial"/>
-                          <a:ea typeface="Arial"/>
-                          <a:cs typeface="Arial"/>
-                        </a:rPr>
-                        <a:t>План продаж по зонам</a:t>
-                      </a:r>
-                    </a:p>
-                    <a:p>
-                      <a:r>
-                        <a:rPr sz="1875">
-                          <a:solidFill>
-                            <a:srgbClr val="15191F"/>
-                          </a:solidFill>
-                          <a:latin typeface="Arial"/>
-                          <a:ea typeface="Arial"/>
-                          <a:cs typeface="Arial"/>
-                        </a:rPr>
-                        <a:t>+ ручная проверка отклонений</a:t>
-                      </a:r>
-                    </a:p>
-                  </a:txBody>
-                  <a:tcPr marL="95250" marR="76200" marT="76200" marB="57150">
-                    <a:solidFill>
-                      <a:srgbClr val="FAF9F6"/>
-                    </a:solidFill>
-                  </a:tcPr>
-                </a:tc>
-                <a:tc>
-                  <a:txBody>
-                    <a:bodyPr/>
-                    <a:lstStyle/>
-                    <a:p>
-                      <a:r>
-                        <a:rPr sz="1875">
-                          <a:solidFill>
-                            <a:srgbClr val="15191F"/>
-                          </a:solidFill>
-                          <a:latin typeface="Arial"/>
-                          <a:ea typeface="Arial"/>
-                          <a:cs typeface="Arial"/>
-                        </a:rPr>
-                        <a:t>На новом периоде сравнить</a:t>
-                      </a:r>
-                    </a:p>
-                    <a:p>
-                      <a:r>
-                        <a:rPr sz="1875">
-                          <a:solidFill>
-                            <a:srgbClr val="15191F"/>
-                          </a:solidFill>
-                          <a:latin typeface="Arial"/>
-                          <a:ea typeface="Arial"/>
-                          <a:cs typeface="Arial"/>
-                        </a:rPr>
-                        <a:t>ошибки и смещение по зонам</a:t>
+              <a:tr h="852488">
+                <a:tc>
+                  <a:txBody>
+                    <a:bodyPr/>
+                    <a:lstStyle/>
+                    <a:p>
+                      <a:r>
+                        <a:rPr sz="1800">
+                          <a:solidFill>
+                            <a:srgbClr val="15191F"/>
+                          </a:solidFill>
+                          <a:latin typeface="Arial"/>
+                          <a:ea typeface="Arial"/>
+                          <a:cs typeface="Arial"/>
+                        </a:rPr>
+                        <a:t>Зона задаёт основную шкалу</a:t>
+                      </a:r>
+                    </a:p>
+                    <a:p>
+                      <a:r>
+                        <a:rPr sz="1800">
+                          <a:solidFill>
+                            <a:srgbClr val="15191F"/>
+                          </a:solidFill>
+                          <a:latin typeface="Arial"/>
+                          <a:ea typeface="Arial"/>
+                          <a:cs typeface="Arial"/>
+                        </a:rPr>
+                        <a:t>Сезон уточняет уровень</a:t>
+                      </a:r>
+                    </a:p>
+                  </a:txBody>
+                  <a:tcPr marL="95250" marR="76200" marT="76200" marB="57150">
+                    <a:solidFill>
+                      <a:srgbClr val="FAF9F6"/>
+                    </a:solidFill>
+                  </a:tcPr>
+                </a:tc>
+                <a:tc>
+                  <a:txBody>
+                    <a:bodyPr/>
+                    <a:lstStyle/>
+                    <a:p>
+                      <a:r>
+                        <a:rPr sz="1800">
+                          <a:solidFill>
+                            <a:srgbClr val="15191F"/>
+                          </a:solidFill>
+                          <a:latin typeface="Arial"/>
+                          <a:ea typeface="Arial"/>
+                          <a:cs typeface="Arial"/>
+                        </a:rPr>
+                        <a:t>План обычных билетов</a:t>
+                      </a:r>
+                    </a:p>
+                    <a:p>
+                      <a:r>
+                        <a:rPr sz="1800">
+                          <a:solidFill>
+                            <a:srgbClr val="15191F"/>
+                          </a:solidFill>
+                          <a:latin typeface="Arial"/>
+                          <a:ea typeface="Arial"/>
+                          <a:cs typeface="Arial"/>
+                        </a:rPr>
+                        <a:t>по каждой зоне и сезону</a:t>
+                      </a:r>
+                    </a:p>
+                  </a:txBody>
+                  <a:tcPr marL="95250" marR="76200" marT="76200" marB="57150">
+                    <a:solidFill>
+                      <a:srgbClr val="FAF9F6"/>
+                    </a:solidFill>
+                  </a:tcPr>
+                </a:tc>
+                <a:tc>
+                  <a:txBody>
+                    <a:bodyPr/>
+                    <a:lstStyle/>
+                    <a:p>
+                      <a:r>
+                        <a:rPr sz="1800">
+                          <a:solidFill>
+                            <a:srgbClr val="15191F"/>
+                          </a:solidFill>
+                          <a:latin typeface="Arial"/>
+                          <a:ea typeface="Arial"/>
+                          <a:cs typeface="Arial"/>
+                        </a:rPr>
+                        <a:t>План и факт по зонам</a:t>
+                      </a:r>
+                    </a:p>
+                    <a:p>
+                      <a:r>
+                        <a:rPr sz="1800">
+                          <a:solidFill>
+                            <a:srgbClr val="15191F"/>
+                          </a:solidFill>
+                          <a:latin typeface="Arial"/>
+                          <a:ea typeface="Arial"/>
+                          <a:cs typeface="Arial"/>
+                        </a:rPr>
+                        <a:t>на следующем периоде</a:t>
                       </a:r>
                     </a:p>
                   </a:txBody>
@@ -12057,109 +12411,109 @@
                   </a:tcPr>
                 </a:tc>
               </a:tr>
-              <a:tr h="828675">
-                <a:tc>
-                  <a:txBody>
-                    <a:bodyPr/>
-                    <a:lstStyle/>
-                    <a:p>
-                      <a:r>
-                        <a:rPr sz="1875">
-                          <a:solidFill>
-                            <a:srgbClr val="15191F"/>
-                          </a:solidFill>
-                          <a:latin typeface="Arial"/>
-                          <a:ea typeface="Arial"/>
-                          <a:cs typeface="Arial"/>
-                        </a:rPr>
-                        <a:t>Без / с продажами: S 132.9 / 114.5</a:t>
-                      </a:r>
-                    </a:p>
-                    <a:p>
-                      <a:r>
-                        <a:rPr sz="1875">
-                          <a:solidFill>
-                            <a:srgbClr val="15191F"/>
-                          </a:solidFill>
-                          <a:latin typeface="Arial"/>
-                          <a:ea typeface="Arial"/>
-                          <a:cs typeface="Arial"/>
-                        </a:rPr>
-                        <a:t>Разные срезы и составы</a:t>
-                      </a:r>
-                    </a:p>
-                  </a:txBody>
-                  <a:tcPr marL="95250" marR="76200" marT="76200" marB="57150">
-                    <a:solidFill>
-                      <a:srgbClr val="FAF9F6"/>
-                    </a:solidFill>
-                  </a:tcPr>
-                </a:tc>
-                <a:tc>
-                  <a:txBody>
-                    <a:bodyPr/>
-                    <a:lstStyle/>
-                    <a:p>
-                      <a:r>
-                        <a:rPr sz="1875">
-                          <a:solidFill>
-                            <a:srgbClr val="15191F"/>
-                          </a:solidFill>
-                          <a:latin typeface="Arial"/>
-                          <a:ea typeface="Arial"/>
-                          <a:cs typeface="Arial"/>
-                        </a:rPr>
-                        <a:t>Предварительный план</a:t>
-                      </a:r>
-                    </a:p>
-                    <a:p>
-                      <a:r>
-                        <a:rPr sz="1875">
-                          <a:solidFill>
-                            <a:srgbClr val="15191F"/>
-                          </a:solidFill>
-                          <a:latin typeface="Arial"/>
-                          <a:ea typeface="Arial"/>
-                          <a:cs typeface="Arial"/>
-                        </a:rPr>
-                        <a:t>+ пересчёт на 7 / 27-й день</a:t>
-                      </a:r>
-                    </a:p>
-                  </a:txBody>
-                  <a:tcPr marL="95250" marR="76200" marT="76200" marB="57150">
-                    <a:solidFill>
-                      <a:srgbClr val="FAF9F6"/>
-                    </a:solidFill>
-                  </a:tcPr>
-                </a:tc>
-                <a:tc>
-                  <a:txBody>
-                    <a:bodyPr/>
-                    <a:lstStyle/>
-                    <a:p>
-                      <a:r>
-                        <a:rPr sz="1875">
-                          <a:solidFill>
-                            <a:srgbClr val="15191F"/>
-                          </a:solidFill>
-                          <a:latin typeface="Arial"/>
-                          <a:ea typeface="Arial"/>
-                          <a:cs typeface="Arial"/>
-                        </a:rPr>
-                        <a:t>Сравнить сохранённые</a:t>
-                      </a:r>
-                    </a:p>
-                    <a:p>
-                      <a:r>
-                        <a:rPr sz="1875">
-                          <a:solidFill>
-                            <a:srgbClr val="15191F"/>
-                          </a:solidFill>
-                          <a:latin typeface="Arial"/>
-                          <a:ea typeface="Arial"/>
-                          <a:cs typeface="Arial"/>
-                        </a:rPr>
-                        <a:t>прогнозы на тех же матчах</a:t>
+              <a:tr h="852488">
+                <a:tc>
+                  <a:txBody>
+                    <a:bodyPr/>
+                    <a:lstStyle/>
+                    <a:p>
+                      <a:r>
+                        <a:rPr sz="1800">
+                          <a:solidFill>
+                            <a:srgbClr val="15191F"/>
+                          </a:solidFill>
+                          <a:latin typeface="Arial"/>
+                          <a:ea typeface="Arial"/>
+                          <a:cs typeface="Arial"/>
+                        </a:rPr>
+                        <a:t>Соперник ~20, день ~16 бил.</a:t>
+                      </a:r>
+                    </a:p>
+                    <a:p>
+                      <a:r>
+                        <a:rPr sz="1800">
+                          <a:solidFill>
+                            <a:srgbClr val="15191F"/>
+                          </a:solidFill>
+                          <a:latin typeface="Arial"/>
+                          <a:ea typeface="Arial"/>
+                          <a:cs typeface="Arial"/>
+                        </a:rPr>
+                        <a:t>Типичные поправки модели</a:t>
+                      </a:r>
+                    </a:p>
+                  </a:txBody>
+                  <a:tcPr marL="95250" marR="76200" marT="76200" marB="57150">
+                    <a:solidFill>
+                      <a:srgbClr val="FAF9F6"/>
+                    </a:solidFill>
+                  </a:tcPr>
+                </a:tc>
+                <a:tc>
+                  <a:txBody>
+                    <a:bodyPr/>
+                    <a:lstStyle/>
+                    <a:p>
+                      <a:r>
+                        <a:rPr sz="1800">
+                          <a:solidFill>
+                            <a:srgbClr val="15191F"/>
+                          </a:solidFill>
+                          <a:latin typeface="Arial"/>
+                          <a:ea typeface="Arial"/>
+                          <a:cs typeface="Arial"/>
+                        </a:rPr>
+                        <a:t>Продвижение опирать</a:t>
+                      </a:r>
+                    </a:p>
+                    <a:p>
+                      <a:r>
+                        <a:rPr sz="1800">
+                          <a:solidFill>
+                            <a:srgbClr val="15191F"/>
+                          </a:solidFill>
+                          <a:latin typeface="Arial"/>
+                          <a:ea typeface="Arial"/>
+                          <a:cs typeface="Arial"/>
+                        </a:rPr>
+                        <a:t>на прогноз спроса зоны</a:t>
+                      </a:r>
+                    </a:p>
+                  </a:txBody>
+                  <a:tcPr marL="95250" marR="76200" marT="76200" marB="57150">
+                    <a:solidFill>
+                      <a:srgbClr val="FAF9F6"/>
+                    </a:solidFill>
+                  </a:tcPr>
+                </a:tc>
+                <a:tc>
+                  <a:txBody>
+                    <a:bodyPr/>
+                    <a:lstStyle/>
+                    <a:p>
+                      <a:r>
+                        <a:rPr sz="1800">
+                          <a:solidFill>
+                            <a:srgbClr val="15191F"/>
+                          </a:solidFill>
+                          <a:latin typeface="Arial"/>
+                          <a:ea typeface="Arial"/>
+                          <a:cs typeface="Arial"/>
+                        </a:rPr>
+                        <a:t>Кампания с контролем</a:t>
+                      </a:r>
+                    </a:p>
+                    <a:p>
+                      <a:r>
+                        <a:rPr sz="1800">
+                          <a:solidFill>
+                            <a:srgbClr val="15191F"/>
+                          </a:solidFill>
+                          <a:latin typeface="Arial"/>
+                          <a:ea typeface="Arial"/>
+                          <a:cs typeface="Arial"/>
+                        </a:rPr>
+                        <a:t>и учётом обычных билетов</a:t>
                       </a:r>
                     </a:p>
                   </a:txBody>
@@ -12170,109 +12524,109 @@
                   </a:tcPr>
                 </a:tc>
               </a:tr>
-              <a:tr h="828675">
-                <a:tc>
-                  <a:txBody>
-                    <a:bodyPr/>
-                    <a:lstStyle/>
-                    <a:p>
-                      <a:r>
-                        <a:rPr sz="1875">
-                          <a:solidFill>
-                            <a:srgbClr val="15191F"/>
-                          </a:solidFill>
-                          <a:latin typeface="Arial"/>
-                          <a:ea typeface="Arial"/>
-                          <a:cs typeface="Arial"/>
-                        </a:rPr>
-                        <a:t>Соперники: n 1–4;</a:t>
-                      </a:r>
-                    </a:p>
-                    <a:p>
-                      <a:r>
-                        <a:rPr sz="1875">
-                          <a:solidFill>
-                            <a:srgbClr val="15191F"/>
-                          </a:solidFill>
-                          <a:latin typeface="Arial"/>
-                          <a:ea typeface="Arial"/>
-                          <a:cs typeface="Arial"/>
-                        </a:rPr>
-                        <a:t>эффект продвижения неизвестен</a:t>
-                      </a:r>
-                    </a:p>
-                  </a:txBody>
-                  <a:tcPr marL="95250" marR="76200" marT="76200" marB="57150">
-                    <a:solidFill>
-                      <a:srgbClr val="FAF9F6"/>
-                    </a:solidFill>
-                  </a:tcPr>
-                </a:tc>
-                <a:tc>
-                  <a:txBody>
-                    <a:bodyPr/>
-                    <a:lstStyle/>
-                    <a:p>
-                      <a:r>
-                        <a:rPr sz="1875">
-                          <a:solidFill>
-                            <a:srgbClr val="15191F"/>
-                          </a:solidFill>
-                          <a:latin typeface="Arial"/>
-                          <a:ea typeface="Arial"/>
-                          <a:cs typeface="Arial"/>
-                        </a:rPr>
-                        <a:t>Приоритеты как гипотеза;</a:t>
-                      </a:r>
-                    </a:p>
-                    <a:p>
-                      <a:r>
-                        <a:rPr sz="1875">
-                          <a:solidFill>
-                            <a:srgbClr val="15191F"/>
-                          </a:solidFill>
-                          <a:latin typeface="Arial"/>
-                          <a:ea typeface="Arial"/>
-                          <a:cs typeface="Arial"/>
-                        </a:rPr>
-                        <a:t>контролируемая кампания</a:t>
-                      </a:r>
-                    </a:p>
-                  </a:txBody>
-                  <a:tcPr marL="95250" marR="76200" marT="76200" marB="57150">
-                    <a:solidFill>
-                      <a:srgbClr val="FAF9F6"/>
-                    </a:solidFill>
-                  </a:tcPr>
-                </a:tc>
-                <a:tc>
-                  <a:txBody>
-                    <a:bodyPr/>
-                    <a:lstStyle/>
-                    <a:p>
-                      <a:r>
-                        <a:rPr sz="1875">
-                          <a:solidFill>
-                            <a:srgbClr val="15191F"/>
-                          </a:solidFill>
-                          <a:latin typeface="Arial"/>
-                          <a:ea typeface="Arial"/>
-                          <a:cs typeface="Arial"/>
-                        </a:rPr>
-                        <a:t>До запуска выбрать контроль</a:t>
-                      </a:r>
-                    </a:p>
-                    <a:p>
-                      <a:r>
-                        <a:rPr sz="1875">
-                          <a:solidFill>
-                            <a:srgbClr val="15191F"/>
-                          </a:solidFill>
-                          <a:latin typeface="Arial"/>
-                          <a:ea typeface="Arial"/>
-                          <a:cs typeface="Arial"/>
-                        </a:rPr>
-                        <a:t>и считать дополнительные билеты</a:t>
+              <a:tr h="852488">
+                <a:tc>
+                  <a:txBody>
+                    <a:bodyPr/>
+                    <a:lstStyle/>
+                    <a:p>
+                      <a:r>
+                        <a:rPr sz="1800">
+                          <a:solidFill>
+                            <a:srgbClr val="15191F"/>
+                          </a:solidFill>
+                          <a:latin typeface="Arial"/>
+                          <a:ea typeface="Arial"/>
+                          <a:cs typeface="Arial"/>
+                        </a:rPr>
+                        <a:t>Зоны 1/3 хуже среднего</a:t>
+                      </a:r>
+                    </a:p>
+                    <a:p>
+                      <a:r>
+                        <a:rPr sz="1800">
+                          <a:solidFill>
+                            <a:srgbClr val="15191F"/>
+                          </a:solidFill>
+                          <a:latin typeface="Arial"/>
+                          <a:ea typeface="Arial"/>
+                          <a:cs typeface="Arial"/>
+                        </a:rPr>
+                        <a:t>Наибольшая ошибка в зоне 6</a:t>
+                      </a:r>
+                    </a:p>
+                  </a:txBody>
+                  <a:tcPr marL="95250" marR="76200" marT="76200" marB="57150">
+                    <a:solidFill>
+                      <a:srgbClr val="FAF9F6"/>
+                    </a:solidFill>
+                  </a:tcPr>
+                </a:tc>
+                <a:tc>
+                  <a:txBody>
+                    <a:bodyPr/>
+                    <a:lstStyle/>
+                    <a:p>
+                      <a:r>
+                        <a:rPr sz="1800">
+                          <a:solidFill>
+                            <a:srgbClr val="15191F"/>
+                          </a:solidFill>
+                          <a:latin typeface="Arial"/>
+                          <a:ea typeface="Arial"/>
+                          <a:cs typeface="Arial"/>
+                        </a:rPr>
+                        <a:t>Ручная проверка отклонений</a:t>
+                      </a:r>
+                    </a:p>
+                    <a:p>
+                      <a:r>
+                        <a:rPr sz="1800">
+                          <a:solidFill>
+                            <a:srgbClr val="15191F"/>
+                          </a:solidFill>
+                          <a:latin typeface="Arial"/>
+                          <a:ea typeface="Arial"/>
+                          <a:cs typeface="Arial"/>
+                        </a:rPr>
+                        <a:t>Сохранять версии пересчёта</a:t>
+                      </a:r>
+                    </a:p>
+                  </a:txBody>
+                  <a:tcPr marL="95250" marR="76200" marT="76200" marB="57150">
+                    <a:solidFill>
+                      <a:srgbClr val="FAF9F6"/>
+                    </a:solidFill>
+                  </a:tcPr>
+                </a:tc>
+                <a:tc>
+                  <a:txBody>
+                    <a:bodyPr/>
+                    <a:lstStyle/>
+                    <a:p>
+                      <a:r>
+                        <a:rPr sz="1800">
+                          <a:solidFill>
+                            <a:srgbClr val="15191F"/>
+                          </a:solidFill>
+                          <a:latin typeface="Arial"/>
+                          <a:ea typeface="Arial"/>
+                          <a:cs typeface="Arial"/>
+                        </a:rPr>
+                        <a:t>Один набор матчей</a:t>
+                      </a:r>
+                    </a:p>
+                    <a:p>
+                      <a:r>
+                        <a:rPr sz="1800">
+                          <a:solidFill>
+                            <a:srgbClr val="15191F"/>
+                          </a:solidFill>
+                          <a:latin typeface="Arial"/>
+                          <a:ea typeface="Arial"/>
+                          <a:cs typeface="Arial"/>
+                        </a:rPr>
+                        <a:t>для сравнения версий</a:t>
                       </a:r>
                     </a:p>
                   </a:txBody>
@@ -12289,10 +12643,10 @@
       </p:graphicFrame>
       <p:sp>
         <p:nvSpPr>
-          <p:cNvPr id="5" name="Следующий честный экзамен: новый период, прав">
+          <p:cNvPr id="5" name="Соперник и день недели уточняют план. Основу ">
             <a:extLst xmlns:a="http://schemas.openxmlformats.org/drawingml/2006/main">
               <a:ext uri="{FF2B5EF4-FFF2-40B4-BE49-F238E27FC236}">
-                <a16:creationId xmlns:a16="http://schemas.microsoft.com/office/drawing/2014/main" id="{322BEE17-F83C-46DE-A6A8-E8D75EFC6620}"/>
+                <a16:creationId xmlns:a16="http://schemas.microsoft.com/office/drawing/2014/main" id="{57422E12-72C7-4FF5-8812-94CE41348348}"/>
               </a:ext>
             </a:extLst>
           </p:cNvPr>
@@ -12303,8 +12657,8 @@
         </p:nvSpPr>
         <p:spPr>
           <a:xfrm xmlns:a="http://schemas.openxmlformats.org/drawingml/2006/main">
-            <a:off x="523875" y="5219700"/>
-            <a:ext cx="11144250" cy="657225"/>
+            <a:off x="523875" y="5305425"/>
+            <a:ext cx="11144250" cy="628650"/>
           </a:xfrm>
           <a:prstGeom xmlns:a="http://schemas.openxmlformats.org/drawingml/2006/main" prst="rect">
             <a:avLst/>
@@ -12350,17 +12704,17 @@
                 <a:ea typeface="Arial"/>
                 <a:cs typeface="Arial"/>
               </a:rPr>
-              <a:t>Следующий честный экзамен: новый период, правила фиксируются заранее</a:t>
+              <a:t>Соперник и день недели уточняют план. Основу задают зона и сезон</a:t>
             </a:r>
           </a:p>
         </p:txBody>
       </p:sp>
       <p:sp>
         <p:nvSpPr>
-          <p:cNvPr id="6" name="Конкретные цены, скидки и денежный эффект тре">
+          <p:cNvPr id="6" name="Цен в данных нет. Пользу рекламы и пересчётов">
             <a:extLst xmlns:a="http://schemas.openxmlformats.org/drawingml/2006/main">
               <a:ext uri="{FF2B5EF4-FFF2-40B4-BE49-F238E27FC236}">
-                <a16:creationId xmlns:a16="http://schemas.microsoft.com/office/drawing/2014/main" id="{C31BD50C-9B26-45A4-90B7-243FEB604618}"/>
+                <a16:creationId xmlns:a16="http://schemas.microsoft.com/office/drawing/2014/main" id="{68B3A2EC-57BF-4B38-B3D2-B8B06DA4EE50}"/>
               </a:ext>
             </a:extLst>
           </p:cNvPr>
@@ -12371,7 +12725,7 @@
         </p:nvSpPr>
         <p:spPr>
           <a:xfrm xmlns:a="http://schemas.openxmlformats.org/drawingml/2006/main">
-            <a:off x="523875" y="5905500"/>
+            <a:off x="523875" y="6038850"/>
             <a:ext cx="11144250" cy="304800"/>
           </a:xfrm>
           <a:prstGeom xmlns:a="http://schemas.openxmlformats.org/drawingml/2006/main" prst="rect">
@@ -12388,7 +12742,7 @@
           </a:bodyPr>
           <a:lstStyle xmlns:a="http://schemas.openxmlformats.org/drawingml/2006/main">
             <a:defPPr>
-              <a:defRPr sz="1800" b="0">
+              <a:defRPr sz="1725" b="0">
                 <a:solidFill>
                   <a:srgbClr val="505C68"/>
                 </a:solidFill>
@@ -12400,7 +12754,7 @@
           </a:lstStyle>
           <a:p xmlns:a="http://schemas.openxmlformats.org/drawingml/2006/main">
             <a:pPr>
-              <a:defRPr sz="1800" b="0">
+              <a:defRPr sz="1725" b="0">
                 <a:solidFill>
                   <a:srgbClr val="505C68"/>
                 </a:solidFill>
@@ -12410,7 +12764,7 @@
               </a:defRPr>
             </a:pPr>
             <a:r>
-              <a:rPr sz="1800" b="0">
+              <a:rPr sz="1725" b="0">
                 <a:solidFill>
                   <a:srgbClr val="505C68"/>
                 </a:solidFill>
@@ -12418,7 +12772,7 @@
                 <a:ea typeface="Arial"/>
                 <a:cs typeface="Arial"/>
               </a:rPr>
-              <a:t>Конкретные цены, скидки и денежный эффект требуют дополнительных данных</a:t>
+              <a:t>Цен в данных нет. Пользу рекламы и пересчётов проверяем отдельным пилотом</a:t>
             </a:r>
           </a:p>
         </p:txBody>
@@ -12426,7 +12780,7 @@
     </p:spTree>
     <p:extLst>
       <p:ext uri="{BB962C8B-B14F-4D97-AF65-F5344CB8AC3E}">
-        <p14:creationId xmlns:p14="http://schemas.microsoft.com/office/powerpoint/2010/main" val="795767338"/>
+        <p14:creationId xmlns:p14="http://schemas.microsoft.com/office/powerpoint/2010/main" val="1098625338"/>
       </p:ext>
     </p:extLst>
   </p:cSld>
